--- a/lecons/F4/55_F4_M2_L43_Mineral_Resources_and_their_Management.pptx
+++ b/lecons/F4/55_F4_M2_L43_Mineral_Resources_and_their_Management.pptx
@@ -12859,7 +12859,7 @@
         <p:spPr>
           <a:xfrm>
             <a:off x="0" y="658368"/>
-            <a:ext cx="3840480" cy="5833872"/>
+            <a:ext cx="5120640" cy="5833872"/>
           </a:xfrm>
           <a:prstGeom prst="rect">
             <a:avLst/>
@@ -12874,8 +12874,8 @@
         </p:nvSpPr>
         <p:spPr>
           <a:xfrm>
-            <a:off x="4069080" y="1005840"/>
-            <a:ext cx="7802575" cy="731520"/>
+            <a:off x="5349240" y="1005840"/>
+            <a:ext cx="6522415" cy="731520"/>
           </a:xfrm>
           <a:prstGeom prst="rect">
             <a:avLst/>
@@ -12915,8 +12915,8 @@
         </p:nvSpPr>
         <p:spPr>
           <a:xfrm>
-            <a:off x="4069080" y="1783080"/>
-            <a:ext cx="7802575" cy="4663440"/>
+            <a:off x="5349240" y="1783080"/>
+            <a:ext cx="6522415" cy="4663440"/>
           </a:xfrm>
           <a:prstGeom prst="rect">
             <a:avLst/>
@@ -12935,7 +12935,7 @@
               <a:buNone/>
             </a:pPr>
             <a:r>
-              <a:rPr lang="en-US" sz="4000" b="1" dirty="0">
+              <a:rPr lang="en-US" sz="3200" b="1" dirty="0">
                 <a:solidFill>
                   <a:srgbClr val="111111"/>
                 </a:solidFill>
@@ -12945,7 +12945,7 @@
               </a:rPr>
               <a:t>Topic: Management of Primary Resources</a:t>
             </a:r>
-            <a:endParaRPr lang="en-US" sz="4000" dirty="0"/>
+            <a:endParaRPr lang="en-US" sz="3200" dirty="0"/>
           </a:p>
           <a:p>
             <a:pPr algn="l" indent="0" marL="0">
@@ -12955,7 +12955,7 @@
               <a:buNone/>
             </a:pPr>
             <a:r>
-              <a:rPr lang="en-US" sz="4000" b="1" dirty="0">
+              <a:rPr lang="en-US" sz="3200" b="1" dirty="0">
                 <a:solidFill>
                   <a:srgbClr val="111111"/>
                 </a:solidFill>
@@ -12965,7 +12965,7 @@
               </a:rPr>
               <a:t>Sub-topic: Forestry, Fishing and Mining as Economic Activities of the Primary Sector</a:t>
             </a:r>
-            <a:endParaRPr lang="en-US" sz="4000" dirty="0"/>
+            <a:endParaRPr lang="en-US" sz="3200" dirty="0"/>
           </a:p>
           <a:p>
             <a:pPr algn="l" indent="0" marL="0">
@@ -12975,7 +12975,7 @@
               <a:buNone/>
             </a:pPr>
             <a:r>
-              <a:rPr lang="en-US" sz="4000" b="1" dirty="0">
+              <a:rPr lang="en-US" sz="3200" b="1" dirty="0">
                 <a:solidFill>
                   <a:srgbClr val="990011"/>
                 </a:solidFill>
@@ -12985,7 +12985,7 @@
               </a:rPr>
               <a:t>Lesson 43: Mineral Resources and their Management</a:t>
             </a:r>
-            <a:endParaRPr lang="en-US" sz="4000" dirty="0"/>
+            <a:endParaRPr lang="en-US" sz="3200" dirty="0"/>
           </a:p>
         </p:txBody>
       </p:sp>

--- a/lecons/F4/55_F4_M2_L43_Mineral_Resources_and_their_Management.pptx
+++ b/lecons/F4/55_F4_M2_L43_Mineral_Resources_and_their_Management.pptx
@@ -55,9 +55,11 @@
     <p:sldId id="303" r:id="rId49"/>
     <p:sldId id="304" r:id="rId50"/>
     <p:sldId id="305" r:id="rId51"/>
+    <p:sldId id="306" r:id="rId52"/>
+    <p:sldId id="307" r:id="rId53"/>
   </p:sldIdLst>
   <p:notesMasterIdLst>
-    <p:notesMasterId r:id="rId52"/>
+    <p:notesMasterId r:id="rId54"/>
   </p:notesMasterIdLst>
   <p:sldSz cx="12192000" cy="6858000"/>
   <p:notesSz cx="6858000" cy="12192000"/>
@@ -3279,7 +3281,7 @@
           <a:p>
             <a:r>
               <a:rPr lang="en-US" dirty="0"/>
-              <a:t>Let us copy Importance and Conservation. Minerals are important and must be conserved. On this slide we have Importance and Conservation. Write each point on a new line, with the key term first, and explain it in your own words when we revise.</a:t>
+              <a:t>Let us copy Importance. Minerals are important for the following reasons. On this slide we have Raw materials, Jobs and Export income. Write each point on a new line, with the key term first, and explain it in your own words when we revise.</a:t>
             </a:r>
             <a:endParaRPr lang="en-US" dirty="0"/>
           </a:p>
@@ -3367,7 +3369,7 @@
           <a:p>
             <a:r>
               <a:rPr lang="en-US" dirty="0"/>
-              <a:t>Now let us check what you have understood. Question 1: Give two metallic and two non-metallic minerals. Answer in your exercise book.</a:t>
+              <a:t>Let us copy Conservation. Minerals are conserved by the following methods. On this slide we have Recycling, Substitution and Efficient use. Write each point on a new line, with the key term first, and explain it in your own words when we revise. When you finish, we go to the next slide.</a:t>
             </a:r>
             <a:endParaRPr lang="en-US" dirty="0"/>
           </a:p>
@@ -3543,7 +3545,7 @@
           <a:p>
             <a:r>
               <a:rPr lang="en-US" dirty="0"/>
-              <a:t>The expected answer is: iron, gold; limestone, salt. If you got it right, well done.</a:t>
+              <a:t>We continue with Conservation. On this slide we have Controlled mining. Write each point on a new line, with the key term first, and explain it in your own words when we revise.</a:t>
             </a:r>
             <a:endParaRPr lang="en-US" dirty="0"/>
           </a:p>
@@ -3631,7 +3633,7 @@
           <a:p>
             <a:r>
               <a:rPr lang="en-US" dirty="0"/>
-              <a:t>Now let us check what you have understood. Question 2: Give two ways to conserve minerals. Answer in your exercise book.</a:t>
+              <a:t>Now let us check what you have understood. Question 1: Give two metallic and two non-metallic minerals. Answer in your exercise book.</a:t>
             </a:r>
             <a:endParaRPr lang="en-US" dirty="0"/>
           </a:p>
@@ -3719,7 +3721,7 @@
           <a:p>
             <a:r>
               <a:rPr lang="en-US" dirty="0"/>
-              <a:t>The expected answer is: recycling and substitution. If you got it right, well done.</a:t>
+              <a:t>The expected answer is: iron, gold; limestone, salt. If you got it right, well done.</a:t>
             </a:r>
             <a:endParaRPr lang="en-US" dirty="0"/>
           </a:p>
@@ -3807,7 +3809,7 @@
           <a:p>
             <a:r>
               <a:rPr lang="en-US" dirty="0"/>
-              <a:t>For those who need more practice, fill in the blanks in your exercise book. The answers are: number 1, bauxite; number 2, non-metallic; number 3, recycling.</a:t>
+              <a:t>Now let us check what you have understood. Question 2: Give two ways to conserve minerals. Answer in your exercise book.</a:t>
             </a:r>
             <a:endParaRPr lang="en-US" dirty="0"/>
           </a:p>
@@ -3895,7 +3897,7 @@
           <a:p>
             <a:r>
               <a:rPr lang="en-US" dirty="0"/>
-              <a:t>For your homework: List five objects at home made from minerals and name the mineral. We shall correct it at the beginning of our next lesson.</a:t>
+              <a:t>The expected answer is: recycling and substitution. If you got it right, well done.</a:t>
             </a:r>
             <a:endParaRPr lang="en-US" dirty="0"/>
           </a:p>
@@ -3983,7 +3985,7 @@
           <a:p>
             <a:r>
               <a:rPr lang="en-US" dirty="0"/>
-              <a:t>Our next lesson will be on Lesson 44: The Management of Mineral Resources in Cameroon. Thank you for your attention, and see you next time.</a:t>
+              <a:t>For those who need more practice, fill in the blanks in your exercise book. The answers are: number 1, bauxite; number 2, non-metallic; number 3, recycling.</a:t>
             </a:r>
             <a:endParaRPr lang="en-US" dirty="0"/>
           </a:p>
@@ -4071,7 +4073,7 @@
           <a:p>
             <a:r>
               <a:rPr lang="en-US" dirty="0"/>
-              <a:t>Let us play the bilingual game. I say a word in English, and you give me the French word. Then we do the reverse.</a:t>
+              <a:t>For your homework: List five objects at home made from minerals and name the mineral. We shall correct it at the beginning of our next lesson.</a:t>
             </a:r>
             <a:endParaRPr lang="en-US" dirty="0"/>
           </a:p>
@@ -4159,7 +4161,7 @@
           <a:p>
             <a:r>
               <a:rPr lang="en-US" dirty="0"/>
-              <a:t>I record this information in the official logbook of the class after the lesson.</a:t>
+              <a:t>Our next lesson will be on Lesson 44: The Management of Mineral Resources in Cameroon. Thank you for your attention, and see you next time.</a:t>
             </a:r>
             <a:endParaRPr lang="en-US" dirty="0"/>
           </a:p>
@@ -4247,7 +4249,7 @@
           <a:p>
             <a:r>
               <a:rPr lang="en-US" dirty="0"/>
-              <a:t>I complete the second page of the logbook: the matter taught, the evaluation, the homework and the attendance.</a:t>
+              <a:t>Let us play the bilingual game. I say a word in English, and you give me the French word. Then we do the reverse.</a:t>
             </a:r>
             <a:endParaRPr lang="en-US" dirty="0"/>
           </a:p>
@@ -4335,7 +4337,7 @@
           <a:p>
             <a:r>
               <a:rPr lang="en-US" dirty="0"/>
-              <a:t>This slide is for me, the teacher: it gives the timing of the lesson and what to do if the projector is not available.</a:t>
+              <a:t>I record this information in the official logbook of the class after the lesson.</a:t>
             </a:r>
             <a:endParaRPr lang="en-US" dirty="0"/>
           </a:p>
@@ -4511,7 +4513,7 @@
           <a:p>
             <a:r>
               <a:rPr lang="en-US" dirty="0"/>
-              <a:t>These are the references and picture credits used to prepare this lesson.</a:t>
+              <a:t>I complete the second page of the logbook: the matter taught, the evaluation, the homework and the attendance.</a:t>
             </a:r>
             <a:endParaRPr lang="en-US" dirty="0"/>
           </a:p>
@@ -4535,6 +4537,182 @@
             <a:fld id="{F7021451-1387-4CA6-816F-3879F97B5CBC}" type="slidenum">
               <a:rPr lang="en-US"/>
               <a:t>50</a:t>
+            </a:fld>
+            <a:endParaRPr lang="en-US"/>
+          </a:p>
+        </p:txBody>
+      </p:sp>
+    </p:spTree>
+    <p:extLst>
+      <p:ext uri="{BB962C8B-B14F-4D97-AF65-F5344CB8AC3E}">
+        <p14:creationId xmlns:p14="http://schemas.microsoft.com/office/powerpoint/2010/main" val="1024086991"/>
+      </p:ext>
+    </p:extLst>
+  </p:cSld>
+  <p:clrMapOvr>
+    <a:masterClrMapping/>
+  </p:clrMapOvr>
+</p:notes>
+</file>
+
+<file path=ppt/notesSlides/notesSlide51.xml><?xml version="1.0" encoding="utf-8"?>
+<p:notes xmlns:a="http://schemas.openxmlformats.org/drawingml/2006/main" xmlns:r="http://schemas.openxmlformats.org/officeDocument/2006/relationships" xmlns:p="http://schemas.openxmlformats.org/presentationml/2006/main">
+  <p:cSld>
+    <p:spTree>
+      <p:nvGrpSpPr>
+        <p:cNvPr id="1" name=""/>
+        <p:cNvGrpSpPr/>
+        <p:nvPr/>
+      </p:nvGrpSpPr>
+      <p:grpSpPr>
+        <a:xfrm>
+          <a:off x="0" y="0"/>
+          <a:ext cx="0" cy="0"/>
+          <a:chOff x="0" y="0"/>
+          <a:chExt cx="0" cy="0"/>
+        </a:xfrm>
+      </p:grpSpPr>
+      <p:sp>
+        <p:nvSpPr>
+          <p:cNvPr id="2" name="Slide Image Placeholder 1"/>
+          <p:cNvSpPr>
+            <a:spLocks noGrp="1" noRot="1" noChangeAspect="1"/>
+          </p:cNvSpPr>
+          <p:nvPr>
+            <p:ph type="sldImg"/>
+          </p:nvPr>
+        </p:nvSpPr>
+        <p:spPr/>
+      </p:sp>
+      <p:sp>
+        <p:nvSpPr>
+          <p:cNvPr id="3" name="Notes Placeholder 2"/>
+          <p:cNvSpPr>
+            <a:spLocks noGrp="1"/>
+          </p:cNvSpPr>
+          <p:nvPr>
+            <p:ph type="body" idx="1"/>
+          </p:nvPr>
+        </p:nvSpPr>
+        <p:spPr/>
+        <p:txBody>
+          <a:bodyPr/>
+          <a:lstStyle/>
+          <a:p>
+            <a:r>
+              <a:rPr lang="en-US" dirty="0"/>
+              <a:t>This slide is for me, the teacher: it gives the timing of the lesson and what to do if the projector is not available.</a:t>
+            </a:r>
+            <a:endParaRPr lang="en-US" dirty="0"/>
+          </a:p>
+        </p:txBody>
+      </p:sp>
+      <p:sp>
+        <p:nvSpPr>
+          <p:cNvPr id="4" name="Slide Number Placeholder 3"/>
+          <p:cNvSpPr>
+            <a:spLocks noGrp="1"/>
+          </p:cNvSpPr>
+          <p:nvPr>
+            <p:ph type="sldNum" sz="quarter" idx="10"/>
+          </p:nvPr>
+        </p:nvSpPr>
+        <p:spPr/>
+        <p:txBody>
+          <a:bodyPr/>
+          <a:lstStyle/>
+          <a:p>
+            <a:fld id="{F7021451-1387-4CA6-816F-3879F97B5CBC}" type="slidenum">
+              <a:rPr lang="en-US"/>
+              <a:t>51</a:t>
+            </a:fld>
+            <a:endParaRPr lang="en-US"/>
+          </a:p>
+        </p:txBody>
+      </p:sp>
+    </p:spTree>
+    <p:extLst>
+      <p:ext uri="{BB962C8B-B14F-4D97-AF65-F5344CB8AC3E}">
+        <p14:creationId xmlns:p14="http://schemas.microsoft.com/office/powerpoint/2010/main" val="1024086991"/>
+      </p:ext>
+    </p:extLst>
+  </p:cSld>
+  <p:clrMapOvr>
+    <a:masterClrMapping/>
+  </p:clrMapOvr>
+</p:notes>
+</file>
+
+<file path=ppt/notesSlides/notesSlide52.xml><?xml version="1.0" encoding="utf-8"?>
+<p:notes xmlns:a="http://schemas.openxmlformats.org/drawingml/2006/main" xmlns:r="http://schemas.openxmlformats.org/officeDocument/2006/relationships" xmlns:p="http://schemas.openxmlformats.org/presentationml/2006/main">
+  <p:cSld>
+    <p:spTree>
+      <p:nvGrpSpPr>
+        <p:cNvPr id="1" name=""/>
+        <p:cNvGrpSpPr/>
+        <p:nvPr/>
+      </p:nvGrpSpPr>
+      <p:grpSpPr>
+        <a:xfrm>
+          <a:off x="0" y="0"/>
+          <a:ext cx="0" cy="0"/>
+          <a:chOff x="0" y="0"/>
+          <a:chExt cx="0" cy="0"/>
+        </a:xfrm>
+      </p:grpSpPr>
+      <p:sp>
+        <p:nvSpPr>
+          <p:cNvPr id="2" name="Slide Image Placeholder 1"/>
+          <p:cNvSpPr>
+            <a:spLocks noGrp="1" noRot="1" noChangeAspect="1"/>
+          </p:cNvSpPr>
+          <p:nvPr>
+            <p:ph type="sldImg"/>
+          </p:nvPr>
+        </p:nvSpPr>
+        <p:spPr/>
+      </p:sp>
+      <p:sp>
+        <p:nvSpPr>
+          <p:cNvPr id="3" name="Notes Placeholder 2"/>
+          <p:cNvSpPr>
+            <a:spLocks noGrp="1"/>
+          </p:cNvSpPr>
+          <p:nvPr>
+            <p:ph type="body" idx="1"/>
+          </p:nvPr>
+        </p:nvSpPr>
+        <p:spPr/>
+        <p:txBody>
+          <a:bodyPr/>
+          <a:lstStyle/>
+          <a:p>
+            <a:r>
+              <a:rPr lang="en-US" dirty="0"/>
+              <a:t>These are the references and picture credits used to prepare this lesson.</a:t>
+            </a:r>
+            <a:endParaRPr lang="en-US" dirty="0"/>
+          </a:p>
+        </p:txBody>
+      </p:sp>
+      <p:sp>
+        <p:nvSpPr>
+          <p:cNvPr id="4" name="Slide Number Placeholder 3"/>
+          <p:cNvSpPr>
+            <a:spLocks noGrp="1"/>
+          </p:cNvSpPr>
+          <p:nvPr>
+            <p:ph type="sldNum" sz="quarter" idx="10"/>
+          </p:nvPr>
+        </p:nvSpPr>
+        <p:spPr/>
+        <p:txBody>
+          <a:bodyPr/>
+          <a:lstStyle/>
+          <a:p>
+            <a:fld id="{F7021451-1387-4CA6-816F-3879F97B5CBC}" type="slidenum">
+              <a:rPr lang="en-US"/>
+              <a:t>52</a:t>
             </a:fld>
             <a:endParaRPr lang="en-US"/>
           </a:p>
@@ -14117,7 +14295,7 @@
         <p:spPr>
           <a:xfrm>
             <a:off x="0" y="658368"/>
-            <a:ext cx="1463040" cy="5833872"/>
+            <a:ext cx="2468880" cy="5833872"/>
           </a:xfrm>
           <a:prstGeom prst="rect">
             <a:avLst/>
@@ -14132,8 +14310,8 @@
         </p:nvSpPr>
         <p:spPr>
           <a:xfrm>
-            <a:off x="1691640" y="1005840"/>
-            <a:ext cx="10180015" cy="731520"/>
+            <a:off x="2697480" y="1005840"/>
+            <a:ext cx="9174175" cy="731520"/>
           </a:xfrm>
           <a:prstGeom prst="rect">
             <a:avLst/>
@@ -14173,8 +14351,47 @@
         </p:nvSpPr>
         <p:spPr>
           <a:xfrm>
-            <a:off x="1691640" y="1783080"/>
-            <a:ext cx="10180015" cy="4663440"/>
+            <a:off x="2697480" y="1737360"/>
+            <a:ext cx="9174175" cy="457200"/>
+          </a:xfrm>
+          <a:prstGeom prst="rect">
+            <a:avLst/>
+          </a:prstGeom>
+          <a:noFill/>
+          <a:ln/>
+        </p:spPr>
+        <p:txBody>
+          <a:bodyPr wrap="square" lIns="0" tIns="0" rIns="0" bIns="0" rtlCol="0" anchor="ctr"/>
+          <a:lstStyle/>
+          <a:p>
+            <a:pPr algn="l" indent="0" marL="0">
+              <a:buNone/>
+            </a:pPr>
+            <a:r>
+              <a:rPr lang="en-US" sz="3200" b="1" dirty="0">
+                <a:solidFill>
+                  <a:srgbClr val="990011"/>
+                </a:solidFill>
+                <a:latin typeface="Times New Roman" pitchFamily="34" charset="0"/>
+                <a:ea typeface="Times New Roman" pitchFamily="34" charset="-122"/>
+                <a:cs typeface="Times New Roman" pitchFamily="34" charset="-120"/>
+              </a:rPr>
+              <a:t>A) Importance</a:t>
+            </a:r>
+            <a:endParaRPr lang="en-US" sz="3200" dirty="0"/>
+          </a:p>
+        </p:txBody>
+      </p:sp>
+      <p:sp>
+        <p:nvSpPr>
+          <p:cNvPr id="6" name="Text 3"/>
+          <p:cNvSpPr/>
+          <p:nvPr/>
+        </p:nvSpPr>
+        <p:spPr>
+          <a:xfrm>
+            <a:off x="2697480" y="2240280"/>
+            <a:ext cx="9174175" cy="4206240"/>
           </a:xfrm>
           <a:prstGeom prst="rect">
             <a:avLst/>
@@ -14201,7 +14418,7 @@
                 <a:ea typeface="Times New Roman" pitchFamily="34" charset="-122"/>
                 <a:cs typeface="Times New Roman" pitchFamily="34" charset="-120"/>
               </a:rPr>
-              <a:t>Minerals are important and must be conserved:</a:t>
+              <a:t>Minerals are important for the following reasons:</a:t>
             </a:r>
             <a:endParaRPr lang="en-US" sz="4000" dirty="0"/>
           </a:p>
@@ -14221,7 +14438,7 @@
                 <a:ea typeface="Times New Roman" pitchFamily="34" charset="-122"/>
                 <a:cs typeface="Times New Roman" pitchFamily="34" charset="-120"/>
               </a:rPr>
-              <a:t>Importance: </a:t>
+              <a:t>Raw materials: </a:t>
             </a:r>
             <a:pPr algn="l" indent="0" marL="0">
               <a:spcAft>
@@ -14238,7 +14455,7 @@
                 <a:ea typeface="Times New Roman" pitchFamily="34" charset="-122"/>
                 <a:cs typeface="Times New Roman" pitchFamily="34" charset="-120"/>
               </a:rPr>
-              <a:t>They are raw materials for industry and bring jobs and export income.</a:t>
+              <a:t>Industries use them to make goods.</a:t>
             </a:r>
             <a:endParaRPr lang="en-US" sz="4000" dirty="0"/>
           </a:p>
@@ -14258,7 +14475,7 @@
                 <a:ea typeface="Times New Roman" pitchFamily="34" charset="-122"/>
                 <a:cs typeface="Times New Roman" pitchFamily="34" charset="-120"/>
               </a:rPr>
-              <a:t>Conservation: </a:t>
+              <a:t>Jobs: </a:t>
             </a:r>
             <a:pPr algn="l" indent="0" marL="0">
               <a:spcAft>
@@ -14275,7 +14492,44 @@
                 <a:ea typeface="Times New Roman" pitchFamily="34" charset="-122"/>
                 <a:cs typeface="Times New Roman" pitchFamily="34" charset="-120"/>
               </a:rPr>
-              <a:t>Recycling, substitution, efficient use and controlled mining make minerals last.</a:t>
+              <a:t>Many people work in mines.</a:t>
+            </a:r>
+            <a:endParaRPr lang="en-US" sz="4000" dirty="0"/>
+          </a:p>
+          <a:p>
+            <a:pPr algn="l" indent="0" marL="0">
+              <a:spcAft>
+                <a:spcPts val="800"/>
+              </a:spcAft>
+              <a:buNone/>
+            </a:pPr>
+            <a:r>
+              <a:rPr lang="en-US" sz="4000" b="1" dirty="0">
+                <a:solidFill>
+                  <a:srgbClr val="111111"/>
+                </a:solidFill>
+                <a:latin typeface="Times New Roman" pitchFamily="34" charset="0"/>
+                <a:ea typeface="Times New Roman" pitchFamily="34" charset="-122"/>
+                <a:cs typeface="Times New Roman" pitchFamily="34" charset="-120"/>
+              </a:rPr>
+              <a:t>Export income: </a:t>
+            </a:r>
+            <a:pPr algn="l" indent="0" marL="0">
+              <a:spcAft>
+                <a:spcPts val="800"/>
+              </a:spcAft>
+              <a:buNone/>
+            </a:pPr>
+            <a:r>
+              <a:rPr lang="en-US" sz="4000" dirty="0">
+                <a:solidFill>
+                  <a:srgbClr val="111111"/>
+                </a:solidFill>
+                <a:latin typeface="Times New Roman" pitchFamily="34" charset="0"/>
+                <a:ea typeface="Times New Roman" pitchFamily="34" charset="-122"/>
+                <a:cs typeface="Times New Roman" pitchFamily="34" charset="-120"/>
+              </a:rPr>
+              <a:t>Minerals are sold abroad.</a:t>
             </a:r>
             <a:endParaRPr lang="en-US" sz="4000" dirty="0"/>
           </a:p>
@@ -14387,7 +14641,7 @@
                 <a:ea typeface="Calibri" pitchFamily="34" charset="-122"/>
                 <a:cs typeface="Calibri" pitchFamily="34" charset="-120"/>
               </a:rPr>
-              <a:t>FORMATIVE EVALUATION</a:t>
+              <a:t>BOARD SUMMARY</a:t>
             </a:r>
             <a:endParaRPr lang="en-US" sz="1400" dirty="0"/>
           </a:p>
@@ -14410,7 +14664,7 @@
         <p:spPr>
           <a:xfrm>
             <a:off x="0" y="658368"/>
-            <a:ext cx="5120640" cy="5833872"/>
+            <a:ext cx="2468880" cy="5833872"/>
           </a:xfrm>
           <a:prstGeom prst="rect">
             <a:avLst/>
@@ -14425,8 +14679,8 @@
         </p:nvSpPr>
         <p:spPr>
           <a:xfrm>
-            <a:off x="5349240" y="1005840"/>
-            <a:ext cx="6522415" cy="731520"/>
+            <a:off x="2697480" y="1005840"/>
+            <a:ext cx="9174175" cy="731520"/>
           </a:xfrm>
           <a:prstGeom prst="rect">
             <a:avLst/>
@@ -14452,7 +14706,7 @@
                 <a:ea typeface="Times New Roman" pitchFamily="34" charset="-122"/>
                 <a:cs typeface="Times New Roman" pitchFamily="34" charset="-120"/>
               </a:rPr>
-              <a:t>Evaluation 1</a:t>
+              <a:t>2. Importance and Conservation</a:t>
             </a:r>
             <a:endParaRPr lang="en-US" sz="3600" dirty="0"/>
           </a:p>
@@ -14466,8 +14720,47 @@
         </p:nvSpPr>
         <p:spPr>
           <a:xfrm>
-            <a:off x="5349240" y="1783080"/>
-            <a:ext cx="6522415" cy="4663440"/>
+            <a:off x="2697480" y="1737360"/>
+            <a:ext cx="9174175" cy="457200"/>
+          </a:xfrm>
+          <a:prstGeom prst="rect">
+            <a:avLst/>
+          </a:prstGeom>
+          <a:noFill/>
+          <a:ln/>
+        </p:spPr>
+        <p:txBody>
+          <a:bodyPr wrap="square" lIns="0" tIns="0" rIns="0" bIns="0" rtlCol="0" anchor="ctr"/>
+          <a:lstStyle/>
+          <a:p>
+            <a:pPr algn="l" indent="0" marL="0">
+              <a:buNone/>
+            </a:pPr>
+            <a:r>
+              <a:rPr lang="en-US" sz="3200" b="1" dirty="0">
+                <a:solidFill>
+                  <a:srgbClr val="990011"/>
+                </a:solidFill>
+                <a:latin typeface="Times New Roman" pitchFamily="34" charset="0"/>
+                <a:ea typeface="Times New Roman" pitchFamily="34" charset="-122"/>
+                <a:cs typeface="Times New Roman" pitchFamily="34" charset="-120"/>
+              </a:rPr>
+              <a:t>B) Conservation</a:t>
+            </a:r>
+            <a:endParaRPr lang="en-US" sz="3200" dirty="0"/>
+          </a:p>
+        </p:txBody>
+      </p:sp>
+      <p:sp>
+        <p:nvSpPr>
+          <p:cNvPr id="6" name="Text 3"/>
+          <p:cNvSpPr/>
+          <p:nvPr/>
+        </p:nvSpPr>
+        <p:spPr>
+          <a:xfrm>
+            <a:off x="2697480" y="2240280"/>
+            <a:ext cx="9174175" cy="4206240"/>
           </a:xfrm>
           <a:prstGeom prst="rect">
             <a:avLst/>
@@ -14486,7 +14779,7 @@
               <a:buNone/>
             </a:pPr>
             <a:r>
-              <a:rPr lang="en-US" sz="4000" dirty="0">
+              <a:rPr lang="en-US" sz="4000" i="1" dirty="0">
                 <a:solidFill>
                   <a:srgbClr val="111111"/>
                 </a:solidFill>
@@ -14494,7 +14787,118 @@
                 <a:ea typeface="Times New Roman" pitchFamily="34" charset="-122"/>
                 <a:cs typeface="Times New Roman" pitchFamily="34" charset="-120"/>
               </a:rPr>
-              <a:t>Give two metallic and two non-metallic minerals.</a:t>
+              <a:t>Minerals are conserved by the following methods:</a:t>
+            </a:r>
+            <a:endParaRPr lang="en-US" sz="4000" dirty="0"/>
+          </a:p>
+          <a:p>
+            <a:pPr algn="l" indent="0" marL="0">
+              <a:spcAft>
+                <a:spcPts val="800"/>
+              </a:spcAft>
+              <a:buNone/>
+            </a:pPr>
+            <a:r>
+              <a:rPr lang="en-US" sz="4000" b="1" dirty="0">
+                <a:solidFill>
+                  <a:srgbClr val="111111"/>
+                </a:solidFill>
+                <a:latin typeface="Times New Roman" pitchFamily="34" charset="0"/>
+                <a:ea typeface="Times New Roman" pitchFamily="34" charset="-122"/>
+                <a:cs typeface="Times New Roman" pitchFamily="34" charset="-120"/>
+              </a:rPr>
+              <a:t>Recycling: </a:t>
+            </a:r>
+            <a:pPr algn="l" indent="0" marL="0">
+              <a:spcAft>
+                <a:spcPts val="800"/>
+              </a:spcAft>
+              <a:buNone/>
+            </a:pPr>
+            <a:r>
+              <a:rPr lang="en-US" sz="4000" dirty="0">
+                <a:solidFill>
+                  <a:srgbClr val="111111"/>
+                </a:solidFill>
+                <a:latin typeface="Times New Roman" pitchFamily="34" charset="0"/>
+                <a:ea typeface="Times New Roman" pitchFamily="34" charset="-122"/>
+                <a:cs typeface="Times New Roman" pitchFamily="34" charset="-120"/>
+              </a:rPr>
+              <a:t>Old metals are used again.</a:t>
+            </a:r>
+            <a:endParaRPr lang="en-US" sz="4000" dirty="0"/>
+          </a:p>
+          <a:p>
+            <a:pPr algn="l" indent="0" marL="0">
+              <a:spcAft>
+                <a:spcPts val="800"/>
+              </a:spcAft>
+              <a:buNone/>
+            </a:pPr>
+            <a:r>
+              <a:rPr lang="en-US" sz="4000" b="1" dirty="0">
+                <a:solidFill>
+                  <a:srgbClr val="111111"/>
+                </a:solidFill>
+                <a:latin typeface="Times New Roman" pitchFamily="34" charset="0"/>
+                <a:ea typeface="Times New Roman" pitchFamily="34" charset="-122"/>
+                <a:cs typeface="Times New Roman" pitchFamily="34" charset="-120"/>
+              </a:rPr>
+              <a:t>Substitution: </a:t>
+            </a:r>
+            <a:pPr algn="l" indent="0" marL="0">
+              <a:spcAft>
+                <a:spcPts val="800"/>
+              </a:spcAft>
+              <a:buNone/>
+            </a:pPr>
+            <a:r>
+              <a:rPr lang="en-US" sz="4000" dirty="0">
+                <a:solidFill>
+                  <a:srgbClr val="111111"/>
+                </a:solidFill>
+                <a:latin typeface="Times New Roman" pitchFamily="34" charset="0"/>
+                <a:ea typeface="Times New Roman" pitchFamily="34" charset="-122"/>
+                <a:cs typeface="Times New Roman" pitchFamily="34" charset="-120"/>
+              </a:rPr>
+              <a:t>Other materials replace rare minerals.</a:t>
+            </a:r>
+            <a:endParaRPr lang="en-US" sz="4000" dirty="0"/>
+          </a:p>
+          <a:p>
+            <a:pPr algn="l" indent="0" marL="0">
+              <a:spcAft>
+                <a:spcPts val="800"/>
+              </a:spcAft>
+              <a:buNone/>
+            </a:pPr>
+            <a:r>
+              <a:rPr lang="en-US" sz="4000" b="1" dirty="0">
+                <a:solidFill>
+                  <a:srgbClr val="111111"/>
+                </a:solidFill>
+                <a:latin typeface="Times New Roman" pitchFamily="34" charset="0"/>
+                <a:ea typeface="Times New Roman" pitchFamily="34" charset="-122"/>
+                <a:cs typeface="Times New Roman" pitchFamily="34" charset="-120"/>
+              </a:rPr>
+              <a:t>Efficient use: </a:t>
+            </a:r>
+            <a:pPr algn="l" indent="0" marL="0">
+              <a:spcAft>
+                <a:spcPts val="800"/>
+              </a:spcAft>
+              <a:buNone/>
+            </a:pPr>
+            <a:r>
+              <a:rPr lang="en-US" sz="4000" dirty="0">
+                <a:solidFill>
+                  <a:srgbClr val="111111"/>
+                </a:solidFill>
+                <a:latin typeface="Times New Roman" pitchFamily="34" charset="0"/>
+                <a:ea typeface="Times New Roman" pitchFamily="34" charset="-122"/>
+                <a:cs typeface="Times New Roman" pitchFamily="34" charset="-120"/>
+              </a:rPr>
+              <a:t>Less mineral is wasted.</a:t>
             </a:r>
             <a:endParaRPr lang="en-US" sz="4000" dirty="0"/>
           </a:p>
@@ -14845,7 +15249,7 @@
                 <a:ea typeface="Calibri" pitchFamily="34" charset="-122"/>
                 <a:cs typeface="Calibri" pitchFamily="34" charset="-120"/>
               </a:rPr>
-              <a:t>FORMATIVE EVALUATION</a:t>
+              <a:t>BOARD SUMMARY</a:t>
             </a:r>
             <a:endParaRPr lang="en-US" sz="1400" dirty="0"/>
           </a:p>
@@ -14910,7 +15314,7 @@
                 <a:ea typeface="Times New Roman" pitchFamily="34" charset="-122"/>
                 <a:cs typeface="Times New Roman" pitchFamily="34" charset="-120"/>
               </a:rPr>
-              <a:t>Expected Answer</a:t>
+              <a:t>2. Importance and Conservation</a:t>
             </a:r>
             <a:endParaRPr lang="en-US" sz="3600" dirty="0"/>
           </a:p>
@@ -14924,8 +15328,47 @@
         </p:nvSpPr>
         <p:spPr>
           <a:xfrm>
-            <a:off x="5349240" y="1783080"/>
-            <a:ext cx="6522415" cy="4663440"/>
+            <a:off x="5349240" y="1737360"/>
+            <a:ext cx="6522415" cy="457200"/>
+          </a:xfrm>
+          <a:prstGeom prst="rect">
+            <a:avLst/>
+          </a:prstGeom>
+          <a:noFill/>
+          <a:ln/>
+        </p:spPr>
+        <p:txBody>
+          <a:bodyPr wrap="square" lIns="0" tIns="0" rIns="0" bIns="0" rtlCol="0" anchor="ctr"/>
+          <a:lstStyle/>
+          <a:p>
+            <a:pPr algn="l" indent="0" marL="0">
+              <a:buNone/>
+            </a:pPr>
+            <a:r>
+              <a:rPr lang="en-US" sz="3200" b="1" dirty="0">
+                <a:solidFill>
+                  <a:srgbClr val="990011"/>
+                </a:solidFill>
+                <a:latin typeface="Times New Roman" pitchFamily="34" charset="0"/>
+                <a:ea typeface="Times New Roman" pitchFamily="34" charset="-122"/>
+                <a:cs typeface="Times New Roman" pitchFamily="34" charset="-120"/>
+              </a:rPr>
+              <a:t>B) Conservation (continued)</a:t>
+            </a:r>
+            <a:endParaRPr lang="en-US" sz="3200" dirty="0"/>
+          </a:p>
+        </p:txBody>
+      </p:sp>
+      <p:sp>
+        <p:nvSpPr>
+          <p:cNvPr id="6" name="Text 3"/>
+          <p:cNvSpPr/>
+          <p:nvPr/>
+        </p:nvSpPr>
+        <p:spPr>
+          <a:xfrm>
+            <a:off x="5349240" y="2240280"/>
+            <a:ext cx="6522415" cy="4206240"/>
           </a:xfrm>
           <a:prstGeom prst="rect">
             <a:avLst/>
@@ -14944,7 +15387,7 @@
               <a:buNone/>
             </a:pPr>
             <a:r>
-              <a:rPr lang="en-US" sz="4000" dirty="0">
+              <a:rPr lang="en-US" sz="4000" b="1" dirty="0">
                 <a:solidFill>
                   <a:srgbClr val="111111"/>
                 </a:solidFill>
@@ -14952,7 +15395,24 @@
                 <a:ea typeface="Times New Roman" pitchFamily="34" charset="-122"/>
                 <a:cs typeface="Times New Roman" pitchFamily="34" charset="-120"/>
               </a:rPr>
-              <a:t>Iron, gold; limestone, salt.</a:t>
+              <a:t>Controlled mining: </a:t>
+            </a:r>
+            <a:pPr algn="l" indent="0" marL="0">
+              <a:spcAft>
+                <a:spcPts val="800"/>
+              </a:spcAft>
+              <a:buNone/>
+            </a:pPr>
+            <a:r>
+              <a:rPr lang="en-US" sz="4000" dirty="0">
+                <a:solidFill>
+                  <a:srgbClr val="111111"/>
+                </a:solidFill>
+                <a:latin typeface="Times New Roman" pitchFamily="34" charset="0"/>
+                <a:ea typeface="Times New Roman" pitchFamily="34" charset="-122"/>
+                <a:cs typeface="Times New Roman" pitchFamily="34" charset="-120"/>
+              </a:rPr>
+              <a:t>Only permitted mining is allowed.</a:t>
             </a:r>
             <a:endParaRPr lang="en-US" sz="4000" dirty="0"/>
           </a:p>
@@ -15129,7 +15589,7 @@
                 <a:ea typeface="Times New Roman" pitchFamily="34" charset="-122"/>
                 <a:cs typeface="Times New Roman" pitchFamily="34" charset="-120"/>
               </a:rPr>
-              <a:t>Evaluation 2</a:t>
+              <a:t>Evaluation 1</a:t>
             </a:r>
             <a:endParaRPr lang="en-US" sz="3600" dirty="0"/>
           </a:p>
@@ -15171,7 +15631,7 @@
                 <a:ea typeface="Times New Roman" pitchFamily="34" charset="-122"/>
                 <a:cs typeface="Times New Roman" pitchFamily="34" charset="-120"/>
               </a:rPr>
-              <a:t>Give two ways to conserve minerals.</a:t>
+              <a:t>Give two metallic and two non-metallic minerals.</a:t>
             </a:r>
             <a:endParaRPr lang="en-US" sz="4000" dirty="0"/>
           </a:p>
@@ -15390,7 +15850,7 @@
                 <a:ea typeface="Times New Roman" pitchFamily="34" charset="-122"/>
                 <a:cs typeface="Times New Roman" pitchFamily="34" charset="-120"/>
               </a:rPr>
-              <a:t>Recycling and substitution.</a:t>
+              <a:t>Iron, gold; limestone, salt.</a:t>
             </a:r>
             <a:endParaRPr lang="en-US" sz="4000" dirty="0"/>
           </a:p>
@@ -15502,7 +15962,7 @@
                 <a:ea typeface="Calibri" pitchFamily="34" charset="-122"/>
                 <a:cs typeface="Calibri" pitchFamily="34" charset="-120"/>
               </a:rPr>
-              <a:t>REMEDIATION</a:t>
+              <a:t>FORMATIVE EVALUATION</a:t>
             </a:r>
             <a:endParaRPr lang="en-US" sz="1400" dirty="0"/>
           </a:p>
@@ -15525,7 +15985,7 @@
         <p:spPr>
           <a:xfrm>
             <a:off x="0" y="658368"/>
-            <a:ext cx="3840480" cy="5833872"/>
+            <a:ext cx="5120640" cy="5833872"/>
           </a:xfrm>
           <a:prstGeom prst="rect">
             <a:avLst/>
@@ -15540,8 +16000,8 @@
         </p:nvSpPr>
         <p:spPr>
           <a:xfrm>
-            <a:off x="4069080" y="1005840"/>
-            <a:ext cx="7802575" cy="731520"/>
+            <a:off x="5349240" y="1005840"/>
+            <a:ext cx="6522415" cy="731520"/>
           </a:xfrm>
           <a:prstGeom prst="rect">
             <a:avLst/>
@@ -15567,7 +16027,7 @@
                 <a:ea typeface="Times New Roman" pitchFamily="34" charset="-122"/>
                 <a:cs typeface="Times New Roman" pitchFamily="34" charset="-120"/>
               </a:rPr>
-              <a:t>Remediation</a:t>
+              <a:t>Evaluation 2</a:t>
             </a:r>
             <a:endParaRPr lang="en-US" sz="3600" dirty="0"/>
           </a:p>
@@ -15581,8 +16041,8 @@
         </p:nvSpPr>
         <p:spPr>
           <a:xfrm>
-            <a:off x="4069080" y="1783080"/>
-            <a:ext cx="7802575" cy="4663440"/>
+            <a:off x="5349240" y="1783080"/>
+            <a:ext cx="6522415" cy="4663440"/>
           </a:xfrm>
           <a:prstGeom prst="rect">
             <a:avLst/>
@@ -15601,7 +16061,7 @@
               <a:buNone/>
             </a:pPr>
             <a:r>
-              <a:rPr lang="en-US" sz="4000" b="1" dirty="0">
+              <a:rPr lang="en-US" sz="4000" dirty="0">
                 <a:solidFill>
                   <a:srgbClr val="111111"/>
                 </a:solidFill>
@@ -15609,73 +16069,7 @@
                 <a:ea typeface="Times New Roman" pitchFamily="34" charset="-122"/>
                 <a:cs typeface="Times New Roman" pitchFamily="34" charset="-120"/>
               </a:rPr>
-              <a:t>Fill in the blanks:</a:t>
-            </a:r>
-            <a:endParaRPr lang="en-US" sz="4000" dirty="0"/>
-          </a:p>
-          <a:p>
-            <a:pPr algn="l" marL="342900" indent="-342900">
-              <a:spcAft>
-                <a:spcPts val="800"/>
-              </a:spcAft>
-              <a:buSzPct val="100000"/>
-              <a:buFont typeface="+mj-lt"/>
-              <a:buAutoNum type="arabicPeriod" startAt="1"/>
-            </a:pPr>
-            <a:r>
-              <a:rPr lang="en-US" sz="4000" dirty="0">
-                <a:solidFill>
-                  <a:srgbClr val="111111"/>
-                </a:solidFill>
-                <a:latin typeface="Times New Roman" pitchFamily="34" charset="0"/>
-                <a:ea typeface="Times New Roman" pitchFamily="34" charset="-122"/>
-                <a:cs typeface="Times New Roman" pitchFamily="34" charset="-120"/>
-              </a:rPr>
-              <a:t>Aluminium is made from ______.</a:t>
-            </a:r>
-            <a:endParaRPr lang="en-US" sz="4000" dirty="0"/>
-          </a:p>
-          <a:p>
-            <a:pPr algn="l" marL="342900" indent="-342900">
-              <a:spcAft>
-                <a:spcPts val="800"/>
-              </a:spcAft>
-              <a:buSzPct val="100000"/>
-              <a:buFont typeface="+mj-lt"/>
-              <a:buAutoNum type="arabicPeriod" startAt="1"/>
-            </a:pPr>
-            <a:r>
-              <a:rPr lang="en-US" sz="4000" dirty="0">
-                <a:solidFill>
-                  <a:srgbClr val="111111"/>
-                </a:solidFill>
-                <a:latin typeface="Times New Roman" pitchFamily="34" charset="0"/>
-                <a:ea typeface="Times New Roman" pitchFamily="34" charset="-122"/>
-                <a:cs typeface="Times New Roman" pitchFamily="34" charset="-120"/>
-              </a:rPr>
-              <a:t>Limestone is a ______ mineral.</a:t>
-            </a:r>
-            <a:endParaRPr lang="en-US" sz="4000" dirty="0"/>
-          </a:p>
-          <a:p>
-            <a:pPr algn="l" marL="342900" indent="-342900">
-              <a:spcAft>
-                <a:spcPts val="800"/>
-              </a:spcAft>
-              <a:buSzPct val="100000"/>
-              <a:buFont typeface="+mj-lt"/>
-              <a:buAutoNum type="arabicPeriod" startAt="1"/>
-            </a:pPr>
-            <a:r>
-              <a:rPr lang="en-US" sz="4000" dirty="0">
-                <a:solidFill>
-                  <a:srgbClr val="111111"/>
-                </a:solidFill>
-                <a:latin typeface="Times New Roman" pitchFamily="34" charset="0"/>
-                <a:ea typeface="Times New Roman" pitchFamily="34" charset="-122"/>
-                <a:cs typeface="Times New Roman" pitchFamily="34" charset="-120"/>
-              </a:rPr>
-              <a:t>Reusing old metals is ______.</a:t>
+              <a:t>Give two ways to conserve minerals.</a:t>
             </a:r>
             <a:endParaRPr lang="en-US" sz="4000" dirty="0"/>
           </a:p>
@@ -15787,7 +16181,7 @@
                 <a:ea typeface="Calibri" pitchFamily="34" charset="-122"/>
                 <a:cs typeface="Calibri" pitchFamily="34" charset="-120"/>
               </a:rPr>
-              <a:t>HOMEWORK</a:t>
+              <a:t>FORMATIVE EVALUATION</a:t>
             </a:r>
             <a:endParaRPr lang="en-US" sz="1400" dirty="0"/>
           </a:p>
@@ -15852,7 +16246,7 @@
                 <a:ea typeface="Times New Roman" pitchFamily="34" charset="-122"/>
                 <a:cs typeface="Times New Roman" pitchFamily="34" charset="-120"/>
               </a:rPr>
-              <a:t>Homework</a:t>
+              <a:t>Expected Answer</a:t>
             </a:r>
             <a:endParaRPr lang="en-US" sz="3600" dirty="0"/>
           </a:p>
@@ -15894,7 +16288,7 @@
                 <a:ea typeface="Times New Roman" pitchFamily="34" charset="-122"/>
                 <a:cs typeface="Times New Roman" pitchFamily="34" charset="-120"/>
               </a:rPr>
-              <a:t>List five objects at home made from minerals and name the mineral.</a:t>
+              <a:t>Recycling and substitution.</a:t>
             </a:r>
             <a:endParaRPr lang="en-US" sz="4000" dirty="0"/>
           </a:p>
@@ -16006,7 +16400,7 @@
                 <a:ea typeface="Calibri" pitchFamily="34" charset="-122"/>
                 <a:cs typeface="Calibri" pitchFamily="34" charset="-120"/>
               </a:rPr>
-              <a:t>NEXT LESSON</a:t>
+              <a:t>REMEDIATION</a:t>
             </a:r>
             <a:endParaRPr lang="en-US" sz="1400" dirty="0"/>
           </a:p>
@@ -16029,7 +16423,7 @@
         <p:spPr>
           <a:xfrm>
             <a:off x="0" y="658368"/>
-            <a:ext cx="5120640" cy="5833872"/>
+            <a:ext cx="3840480" cy="5833872"/>
           </a:xfrm>
           <a:prstGeom prst="rect">
             <a:avLst/>
@@ -16044,8 +16438,8 @@
         </p:nvSpPr>
         <p:spPr>
           <a:xfrm>
-            <a:off x="5349240" y="1005840"/>
-            <a:ext cx="6522415" cy="731520"/>
+            <a:off x="4069080" y="1005840"/>
+            <a:ext cx="7802575" cy="731520"/>
           </a:xfrm>
           <a:prstGeom prst="rect">
             <a:avLst/>
@@ -16071,7 +16465,7 @@
                 <a:ea typeface="Times New Roman" pitchFamily="34" charset="-122"/>
                 <a:cs typeface="Times New Roman" pitchFamily="34" charset="-120"/>
               </a:rPr>
-              <a:t>Next Lesson</a:t>
+              <a:t>Remediation</a:t>
             </a:r>
             <a:endParaRPr lang="en-US" sz="3600" dirty="0"/>
           </a:p>
@@ -16085,8 +16479,8 @@
         </p:nvSpPr>
         <p:spPr>
           <a:xfrm>
-            <a:off x="5349240" y="1783080"/>
-            <a:ext cx="6522415" cy="4663440"/>
+            <a:off x="4069080" y="1783080"/>
+            <a:ext cx="7802575" cy="4663440"/>
           </a:xfrm>
           <a:prstGeom prst="rect">
             <a:avLst/>
@@ -16095,10 +16489,10 @@
           <a:ln/>
         </p:spPr>
         <p:txBody>
-          <a:bodyPr wrap="square" lIns="0" tIns="0" rIns="0" bIns="0" rtlCol="0" anchor="ctr"/>
-          <a:lstStyle/>
-          <a:p>
-            <a:pPr algn="ctr" indent="0" marL="0">
+          <a:bodyPr wrap="square" lIns="0" tIns="0" rIns="0" bIns="0" rtlCol="0" anchor="t"/>
+          <a:lstStyle/>
+          <a:p>
+            <a:pPr algn="l" indent="0" marL="0">
               <a:spcAft>
                 <a:spcPts val="800"/>
               </a:spcAft>
@@ -16113,27 +16507,73 @@
                 <a:ea typeface="Times New Roman" pitchFamily="34" charset="-122"/>
                 <a:cs typeface="Times New Roman" pitchFamily="34" charset="-120"/>
               </a:rPr>
-              <a:t>Our next lesson will be on:</a:t>
+              <a:t>Fill in the blanks:</a:t>
             </a:r>
             <a:endParaRPr lang="en-US" sz="4000" dirty="0"/>
           </a:p>
           <a:p>
-            <a:pPr algn="ctr" indent="0" marL="0">
+            <a:pPr algn="l" marL="342900" indent="-342900">
               <a:spcAft>
                 <a:spcPts val="800"/>
               </a:spcAft>
-              <a:buNone/>
+              <a:buSzPct val="100000"/>
+              <a:buFont typeface="+mj-lt"/>
+              <a:buAutoNum type="arabicPeriod" startAt="1"/>
             </a:pPr>
             <a:r>
-              <a:rPr lang="en-US" sz="4000" b="1" dirty="0">
-                <a:solidFill>
-                  <a:srgbClr val="990011"/>
+              <a:rPr lang="en-US" sz="4000" dirty="0">
+                <a:solidFill>
+                  <a:srgbClr val="111111"/>
                 </a:solidFill>
                 <a:latin typeface="Times New Roman" pitchFamily="34" charset="0"/>
                 <a:ea typeface="Times New Roman" pitchFamily="34" charset="-122"/>
                 <a:cs typeface="Times New Roman" pitchFamily="34" charset="-120"/>
               </a:rPr>
-              <a:t>Lesson 44: The Management of Mineral Resources in Cameroon</a:t>
+              <a:t>Aluminium is made from ______.</a:t>
+            </a:r>
+            <a:endParaRPr lang="en-US" sz="4000" dirty="0"/>
+          </a:p>
+          <a:p>
+            <a:pPr algn="l" marL="342900" indent="-342900">
+              <a:spcAft>
+                <a:spcPts val="800"/>
+              </a:spcAft>
+              <a:buSzPct val="100000"/>
+              <a:buFont typeface="+mj-lt"/>
+              <a:buAutoNum type="arabicPeriod" startAt="1"/>
+            </a:pPr>
+            <a:r>
+              <a:rPr lang="en-US" sz="4000" dirty="0">
+                <a:solidFill>
+                  <a:srgbClr val="111111"/>
+                </a:solidFill>
+                <a:latin typeface="Times New Roman" pitchFamily="34" charset="0"/>
+                <a:ea typeface="Times New Roman" pitchFamily="34" charset="-122"/>
+                <a:cs typeface="Times New Roman" pitchFamily="34" charset="-120"/>
+              </a:rPr>
+              <a:t>Limestone is a ______ mineral.</a:t>
+            </a:r>
+            <a:endParaRPr lang="en-US" sz="4000" dirty="0"/>
+          </a:p>
+          <a:p>
+            <a:pPr algn="l" marL="342900" indent="-342900">
+              <a:spcAft>
+                <a:spcPts val="800"/>
+              </a:spcAft>
+              <a:buSzPct val="100000"/>
+              <a:buFont typeface="+mj-lt"/>
+              <a:buAutoNum type="arabicPeriod" startAt="1"/>
+            </a:pPr>
+            <a:r>
+              <a:rPr lang="en-US" sz="4000" dirty="0">
+                <a:solidFill>
+                  <a:srgbClr val="111111"/>
+                </a:solidFill>
+                <a:latin typeface="Times New Roman" pitchFamily="34" charset="0"/>
+                <a:ea typeface="Times New Roman" pitchFamily="34" charset="-122"/>
+                <a:cs typeface="Times New Roman" pitchFamily="34" charset="-120"/>
+              </a:rPr>
+              <a:t>Reusing old metals is ______.</a:t>
             </a:r>
             <a:endParaRPr lang="en-US" sz="4000" dirty="0"/>
           </a:p>
@@ -16245,6 +16685,464 @@
                 <a:ea typeface="Calibri" pitchFamily="34" charset="-122"/>
                 <a:cs typeface="Calibri" pitchFamily="34" charset="-120"/>
               </a:rPr>
+              <a:t>HOMEWORK</a:t>
+            </a:r>
+            <a:endParaRPr lang="en-US" sz="1400" dirty="0"/>
+          </a:p>
+        </p:txBody>
+      </p:sp>
+      <p:pic>
+        <p:nvPicPr>
+          <p:cNvPr id="3" name="Image 0" descr="/home/claude/f4/img/minesec_sheet.png">    </p:cNvPr>
+          <p:cNvPicPr>
+            <a:picLocks noChangeAspect="1"/>
+          </p:cNvPicPr>
+          <p:nvPr/>
+        </p:nvPicPr>
+        <p:blipFill>
+          <a:blip r:embed="rId1"/>
+          <a:stretch>
+            <a:fillRect/>
+          </a:stretch>
+        </p:blipFill>
+        <p:spPr>
+          <a:xfrm>
+            <a:off x="0" y="658368"/>
+            <a:ext cx="5120640" cy="5833872"/>
+          </a:xfrm>
+          <a:prstGeom prst="rect">
+            <a:avLst/>
+          </a:prstGeom>
+        </p:spPr>
+      </p:pic>
+      <p:sp>
+        <p:nvSpPr>
+          <p:cNvPr id="4" name="Text 1"/>
+          <p:cNvSpPr/>
+          <p:nvPr/>
+        </p:nvSpPr>
+        <p:spPr>
+          <a:xfrm>
+            <a:off x="5349240" y="1005840"/>
+            <a:ext cx="6522415" cy="731520"/>
+          </a:xfrm>
+          <a:prstGeom prst="rect">
+            <a:avLst/>
+          </a:prstGeom>
+          <a:noFill/>
+          <a:ln/>
+        </p:spPr>
+        <p:txBody>
+          <a:bodyPr wrap="square" lIns="0" tIns="0" rIns="0" bIns="0" rtlCol="0" anchor="ctr">
+            <a:normAutofit/>
+          </a:bodyPr>
+          <a:lstStyle/>
+          <a:p>
+            <a:pPr algn="ctr" indent="0" marL="0">
+              <a:buNone/>
+            </a:pPr>
+            <a:r>
+              <a:rPr lang="en-US" sz="3600" b="1" dirty="0">
+                <a:solidFill>
+                  <a:srgbClr val="990011"/>
+                </a:solidFill>
+                <a:latin typeface="Times New Roman" pitchFamily="34" charset="0"/>
+                <a:ea typeface="Times New Roman" pitchFamily="34" charset="-122"/>
+                <a:cs typeface="Times New Roman" pitchFamily="34" charset="-120"/>
+              </a:rPr>
+              <a:t>Homework</a:t>
+            </a:r>
+            <a:endParaRPr lang="en-US" sz="3600" dirty="0"/>
+          </a:p>
+        </p:txBody>
+      </p:sp>
+      <p:sp>
+        <p:nvSpPr>
+          <p:cNvPr id="5" name="Text 2"/>
+          <p:cNvSpPr/>
+          <p:nvPr/>
+        </p:nvSpPr>
+        <p:spPr>
+          <a:xfrm>
+            <a:off x="5349240" y="1783080"/>
+            <a:ext cx="6522415" cy="4663440"/>
+          </a:xfrm>
+          <a:prstGeom prst="rect">
+            <a:avLst/>
+          </a:prstGeom>
+          <a:noFill/>
+          <a:ln/>
+        </p:spPr>
+        <p:txBody>
+          <a:bodyPr wrap="square" lIns="0" tIns="0" rIns="0" bIns="0" rtlCol="0" anchor="t"/>
+          <a:lstStyle/>
+          <a:p>
+            <a:pPr algn="l" indent="0" marL="0">
+              <a:spcAft>
+                <a:spcPts val="800"/>
+              </a:spcAft>
+              <a:buNone/>
+            </a:pPr>
+            <a:r>
+              <a:rPr lang="en-US" sz="4000" dirty="0">
+                <a:solidFill>
+                  <a:srgbClr val="111111"/>
+                </a:solidFill>
+                <a:latin typeface="Times New Roman" pitchFamily="34" charset="0"/>
+                <a:ea typeface="Times New Roman" pitchFamily="34" charset="-122"/>
+                <a:cs typeface="Times New Roman" pitchFamily="34" charset="-120"/>
+              </a:rPr>
+              <a:t>List five objects at home made from minerals and name the mineral.</a:t>
+            </a:r>
+            <a:endParaRPr lang="en-US" sz="4000" dirty="0"/>
+          </a:p>
+        </p:txBody>
+      </p:sp>
+      <p:sp>
+        <p:nvSpPr>
+          <p:cNvPr id="25" name="Slide Number Placeholder 0"/>
+          <p:cNvSpPr>
+            <a:spLocks noGrp="1"/>
+          </p:cNvSpPr>
+          <p:nvPr>
+            <p:ph type="sldNum" sz="quarter" idx="4294967295"/>
+          </p:nvPr>
+        </p:nvSpPr>
+        <p:spPr>
+          <a:xfrm>
+            <a:off x="27432" y="91440"/>
+            <a:ext cx="585216" cy="475488"/>
+          </a:xfrm>
+          <a:prstGeom prst="rect">
+            <a:avLst/>
+          </a:prstGeom>
+          <a:extLst>
+            <a:ext uri="{C572A759-6A51-4108-AA02-DFA0A04FC94B}">
+              <ma14:wrappingTextBoxFlag xmlns:ma14="http://schemas.microsoft.com/office/mac/drawingml/2011/main" val="0"/>
+            </a:ext>
+          </a:extLst>
+        </p:spPr>
+        <p:txBody>
+          <a:bodyPr/>
+          <a:lstStyle>
+            <a:lvl1pPr>
+              <a:defRPr sz="2000">
+                <a:solidFill>
+                  <a:srgbClr val="FFFFFF"/>
+                </a:solidFill>
+                <a:latin typeface="Calibri"/>
+                <a:ea typeface="Calibri"/>
+                <a:cs typeface="Calibri"/>
+              </a:defRPr>
+            </a:lvl1pPr>
+          </a:lstStyle>
+          <a:p>
+            <a:pPr algn="ctr"/>
+            <a:fld id="{F7021451-1387-4CA6-816F-3879F97B5CBC}" type="slidenum">
+              <a:rPr b="1" lang="en-US"/>
+              <a:t>46</a:t>
+            </a:fld>
+            <a:endParaRPr lang="en-US"/>
+          </a:p>
+        </p:txBody>
+      </p:sp>
+    </p:spTree>
+  </p:cSld>
+  <p:clrMapOvr>
+    <a:masterClrMapping/>
+  </p:clrMapOvr>
+</p:sld>
+</file>
+
+<file path=ppt/slides/slide47.xml><?xml version="1.0" encoding="utf-8"?>
+<p:sld xmlns:a="http://schemas.openxmlformats.org/drawingml/2006/main" xmlns:r="http://schemas.openxmlformats.org/officeDocument/2006/relationships" xmlns:p="http://schemas.openxmlformats.org/presentationml/2006/main">
+  <p:cSld name="Slide 47">
+    <p:spTree>
+      <p:nvGrpSpPr>
+        <p:cNvPr id="1" name=""/>
+        <p:cNvGrpSpPr/>
+        <p:nvPr/>
+      </p:nvGrpSpPr>
+      <p:grpSpPr>
+        <a:xfrm>
+          <a:off x="0" y="0"/>
+          <a:ext cx="0" cy="0"/>
+          <a:chOff x="0" y="0"/>
+          <a:chExt cx="0" cy="0"/>
+        </a:xfrm>
+      </p:grpSpPr>
+      <p:sp>
+        <p:nvSpPr>
+          <p:cNvPr id="2" name="Text 0"/>
+          <p:cNvSpPr/>
+          <p:nvPr/>
+        </p:nvSpPr>
+        <p:spPr>
+          <a:xfrm>
+            <a:off x="457200" y="713232"/>
+            <a:ext cx="11368735" cy="274320"/>
+          </a:xfrm>
+          <a:prstGeom prst="rect">
+            <a:avLst/>
+          </a:prstGeom>
+          <a:noFill/>
+          <a:ln/>
+        </p:spPr>
+        <p:txBody>
+          <a:bodyPr wrap="square" lIns="0" tIns="0" rIns="0" bIns="0" rtlCol="0" anchor="ctr"/>
+          <a:lstStyle/>
+          <a:p>
+            <a:pPr algn="r" indent="0" marL="0">
+              <a:buNone/>
+            </a:pPr>
+            <a:r>
+              <a:rPr lang="en-US" sz="1400" b="1" dirty="0">
+                <a:solidFill>
+                  <a:srgbClr val="1C3F6E"/>
+                </a:solidFill>
+                <a:latin typeface="Calibri" pitchFamily="34" charset="0"/>
+                <a:ea typeface="Calibri" pitchFamily="34" charset="-122"/>
+                <a:cs typeface="Calibri" pitchFamily="34" charset="-120"/>
+              </a:rPr>
+              <a:t>NEXT LESSON</a:t>
+            </a:r>
+            <a:endParaRPr lang="en-US" sz="1400" dirty="0"/>
+          </a:p>
+        </p:txBody>
+      </p:sp>
+      <p:pic>
+        <p:nvPicPr>
+          <p:cNvPr id="3" name="Image 0" descr="/home/claude/f4/img/minesec_sheet.png">    </p:cNvPr>
+          <p:cNvPicPr>
+            <a:picLocks noChangeAspect="1"/>
+          </p:cNvPicPr>
+          <p:nvPr/>
+        </p:nvPicPr>
+        <p:blipFill>
+          <a:blip r:embed="rId1"/>
+          <a:stretch>
+            <a:fillRect/>
+          </a:stretch>
+        </p:blipFill>
+        <p:spPr>
+          <a:xfrm>
+            <a:off x="0" y="658368"/>
+            <a:ext cx="5120640" cy="5833872"/>
+          </a:xfrm>
+          <a:prstGeom prst="rect">
+            <a:avLst/>
+          </a:prstGeom>
+        </p:spPr>
+      </p:pic>
+      <p:sp>
+        <p:nvSpPr>
+          <p:cNvPr id="4" name="Text 1"/>
+          <p:cNvSpPr/>
+          <p:nvPr/>
+        </p:nvSpPr>
+        <p:spPr>
+          <a:xfrm>
+            <a:off x="5349240" y="1005840"/>
+            <a:ext cx="6522415" cy="731520"/>
+          </a:xfrm>
+          <a:prstGeom prst="rect">
+            <a:avLst/>
+          </a:prstGeom>
+          <a:noFill/>
+          <a:ln/>
+        </p:spPr>
+        <p:txBody>
+          <a:bodyPr wrap="square" lIns="0" tIns="0" rIns="0" bIns="0" rtlCol="0" anchor="ctr">
+            <a:normAutofit/>
+          </a:bodyPr>
+          <a:lstStyle/>
+          <a:p>
+            <a:pPr algn="ctr" indent="0" marL="0">
+              <a:buNone/>
+            </a:pPr>
+            <a:r>
+              <a:rPr lang="en-US" sz="3600" b="1" dirty="0">
+                <a:solidFill>
+                  <a:srgbClr val="990011"/>
+                </a:solidFill>
+                <a:latin typeface="Times New Roman" pitchFamily="34" charset="0"/>
+                <a:ea typeface="Times New Roman" pitchFamily="34" charset="-122"/>
+                <a:cs typeface="Times New Roman" pitchFamily="34" charset="-120"/>
+              </a:rPr>
+              <a:t>Next Lesson</a:t>
+            </a:r>
+            <a:endParaRPr lang="en-US" sz="3600" dirty="0"/>
+          </a:p>
+        </p:txBody>
+      </p:sp>
+      <p:sp>
+        <p:nvSpPr>
+          <p:cNvPr id="5" name="Text 2"/>
+          <p:cNvSpPr/>
+          <p:nvPr/>
+        </p:nvSpPr>
+        <p:spPr>
+          <a:xfrm>
+            <a:off x="5349240" y="1783080"/>
+            <a:ext cx="6522415" cy="4663440"/>
+          </a:xfrm>
+          <a:prstGeom prst="rect">
+            <a:avLst/>
+          </a:prstGeom>
+          <a:noFill/>
+          <a:ln/>
+        </p:spPr>
+        <p:txBody>
+          <a:bodyPr wrap="square" lIns="0" tIns="0" rIns="0" bIns="0" rtlCol="0" anchor="ctr"/>
+          <a:lstStyle/>
+          <a:p>
+            <a:pPr algn="ctr" indent="0" marL="0">
+              <a:spcAft>
+                <a:spcPts val="800"/>
+              </a:spcAft>
+              <a:buNone/>
+            </a:pPr>
+            <a:r>
+              <a:rPr lang="en-US" sz="4000" b="1" dirty="0">
+                <a:solidFill>
+                  <a:srgbClr val="111111"/>
+                </a:solidFill>
+                <a:latin typeface="Times New Roman" pitchFamily="34" charset="0"/>
+                <a:ea typeface="Times New Roman" pitchFamily="34" charset="-122"/>
+                <a:cs typeface="Times New Roman" pitchFamily="34" charset="-120"/>
+              </a:rPr>
+              <a:t>Our next lesson will be on:</a:t>
+            </a:r>
+            <a:endParaRPr lang="en-US" sz="4000" dirty="0"/>
+          </a:p>
+          <a:p>
+            <a:pPr algn="ctr" indent="0" marL="0">
+              <a:spcAft>
+                <a:spcPts val="800"/>
+              </a:spcAft>
+              <a:buNone/>
+            </a:pPr>
+            <a:r>
+              <a:rPr lang="en-US" sz="4000" b="1" dirty="0">
+                <a:solidFill>
+                  <a:srgbClr val="990011"/>
+                </a:solidFill>
+                <a:latin typeface="Times New Roman" pitchFamily="34" charset="0"/>
+                <a:ea typeface="Times New Roman" pitchFamily="34" charset="-122"/>
+                <a:cs typeface="Times New Roman" pitchFamily="34" charset="-120"/>
+              </a:rPr>
+              <a:t>Lesson 44: The Management of Mineral Resources in Cameroon</a:t>
+            </a:r>
+            <a:endParaRPr lang="en-US" sz="4000" dirty="0"/>
+          </a:p>
+        </p:txBody>
+      </p:sp>
+      <p:sp>
+        <p:nvSpPr>
+          <p:cNvPr id="25" name="Slide Number Placeholder 0"/>
+          <p:cNvSpPr>
+            <a:spLocks noGrp="1"/>
+          </p:cNvSpPr>
+          <p:nvPr>
+            <p:ph type="sldNum" sz="quarter" idx="4294967295"/>
+          </p:nvPr>
+        </p:nvSpPr>
+        <p:spPr>
+          <a:xfrm>
+            <a:off x="27432" y="91440"/>
+            <a:ext cx="585216" cy="475488"/>
+          </a:xfrm>
+          <a:prstGeom prst="rect">
+            <a:avLst/>
+          </a:prstGeom>
+          <a:extLst>
+            <a:ext uri="{C572A759-6A51-4108-AA02-DFA0A04FC94B}">
+              <ma14:wrappingTextBoxFlag xmlns:ma14="http://schemas.microsoft.com/office/mac/drawingml/2011/main" val="0"/>
+            </a:ext>
+          </a:extLst>
+        </p:spPr>
+        <p:txBody>
+          <a:bodyPr/>
+          <a:lstStyle>
+            <a:lvl1pPr>
+              <a:defRPr sz="2000">
+                <a:solidFill>
+                  <a:srgbClr val="FFFFFF"/>
+                </a:solidFill>
+                <a:latin typeface="Calibri"/>
+                <a:ea typeface="Calibri"/>
+                <a:cs typeface="Calibri"/>
+              </a:defRPr>
+            </a:lvl1pPr>
+          </a:lstStyle>
+          <a:p>
+            <a:pPr algn="ctr"/>
+            <a:fld id="{F7021451-1387-4CA6-816F-3879F97B5CBC}" type="slidenum">
+              <a:rPr b="1" lang="en-US"/>
+              <a:t>47</a:t>
+            </a:fld>
+            <a:endParaRPr lang="en-US"/>
+          </a:p>
+        </p:txBody>
+      </p:sp>
+    </p:spTree>
+  </p:cSld>
+  <p:clrMapOvr>
+    <a:masterClrMapping/>
+  </p:clrMapOvr>
+</p:sld>
+</file>
+
+<file path=ppt/slides/slide48.xml><?xml version="1.0" encoding="utf-8"?>
+<p:sld xmlns:a="http://schemas.openxmlformats.org/drawingml/2006/main" xmlns:r="http://schemas.openxmlformats.org/officeDocument/2006/relationships" xmlns:p="http://schemas.openxmlformats.org/presentationml/2006/main">
+  <p:cSld name="Slide 48">
+    <p:spTree>
+      <p:nvGrpSpPr>
+        <p:cNvPr id="1" name=""/>
+        <p:cNvGrpSpPr/>
+        <p:nvPr/>
+      </p:nvGrpSpPr>
+      <p:grpSpPr>
+        <a:xfrm>
+          <a:off x="0" y="0"/>
+          <a:ext cx="0" cy="0"/>
+          <a:chOff x="0" y="0"/>
+          <a:chExt cx="0" cy="0"/>
+        </a:xfrm>
+      </p:grpSpPr>
+      <p:sp>
+        <p:nvSpPr>
+          <p:cNvPr id="2" name="Text 0"/>
+          <p:cNvSpPr/>
+          <p:nvPr/>
+        </p:nvSpPr>
+        <p:spPr>
+          <a:xfrm>
+            <a:off x="457200" y="713232"/>
+            <a:ext cx="11368735" cy="274320"/>
+          </a:xfrm>
+          <a:prstGeom prst="rect">
+            <a:avLst/>
+          </a:prstGeom>
+          <a:noFill/>
+          <a:ln/>
+        </p:spPr>
+        <p:txBody>
+          <a:bodyPr wrap="square" lIns="0" tIns="0" rIns="0" bIns="0" rtlCol="0" anchor="ctr"/>
+          <a:lstStyle/>
+          <a:p>
+            <a:pPr algn="r" indent="0" marL="0">
+              <a:buNone/>
+            </a:pPr>
+            <a:r>
+              <a:rPr lang="en-US" sz="1400" b="1" dirty="0">
+                <a:solidFill>
+                  <a:srgbClr val="1C3F6E"/>
+                </a:solidFill>
+                <a:latin typeface="Calibri" pitchFamily="34" charset="0"/>
+                <a:ea typeface="Calibri" pitchFamily="34" charset="-122"/>
+                <a:cs typeface="Calibri" pitchFamily="34" charset="-120"/>
+              </a:rPr>
               <a:t>BILINGUAL GAME</a:t>
             </a:r>
             <a:endParaRPr lang="en-US" sz="1400" dirty="0"/>
@@ -16292,7 +17190,7 @@
       </p:sp>
       <p:graphicFrame>
         <p:nvGraphicFramePr>
-          <p:cNvPr id="47" name="Table 0"/>
+          <p:cNvPr id="49" name="Table 0"/>
           <p:cNvGraphicFramePr>
             <a:graphicFrameLocks noGrp="1"/>
           </p:cNvGraphicFramePr>
@@ -17328,7 +18226,7 @@
             <a:pPr algn="ctr"/>
             <a:fld id="{F7021451-1387-4CA6-816F-3879F97B5CBC}" type="slidenum">
               <a:rPr b="1" lang="en-US"/>
-              <a:t>46</a:t>
+              <a:t>48</a:t>
             </a:fld>
             <a:endParaRPr lang="en-US"/>
           </a:p>
@@ -17342,9 +18240,9 @@
 </p:sld>
 </file>
 
-<file path=ppt/slides/slide47.xml><?xml version="1.0" encoding="utf-8"?>
+<file path=ppt/slides/slide49.xml><?xml version="1.0" encoding="utf-8"?>
 <p:sld xmlns:a="http://schemas.openxmlformats.org/drawingml/2006/main" xmlns:r="http://schemas.openxmlformats.org/officeDocument/2006/relationships" xmlns:p="http://schemas.openxmlformats.org/presentationml/2006/main">
-  <p:cSld name="Slide 47">
+  <p:cSld name="Slide 49">
     <p:spTree>
       <p:nvGrpSpPr>
         <p:cNvPr id="1" name=""/>
@@ -17439,7 +18337,7 @@
       </p:sp>
       <p:graphicFrame>
         <p:nvGraphicFramePr>
-          <p:cNvPr id="48" name="Table 0"/>
+          <p:cNvPr id="50" name="Table 0"/>
           <p:cNvGraphicFramePr>
             <a:graphicFrameLocks noGrp="1"/>
           </p:cNvGraphicFramePr>
@@ -18061,7 +18959,7 @@
             <a:pPr algn="ctr"/>
             <a:fld id="{F7021451-1387-4CA6-816F-3879F97B5CBC}" type="slidenum">
               <a:rPr b="1" lang="en-US"/>
-              <a:t>47</a:t>
+              <a:t>49</a:t>
             </a:fld>
             <a:endParaRPr lang="en-US"/>
           </a:p>
@@ -18075,9 +18973,9 @@
 </p:sld>
 </file>
 
-<file path=ppt/slides/slide48.xml><?xml version="1.0" encoding="utf-8"?>
+<file path=ppt/slides/slide5.xml><?xml version="1.0" encoding="utf-8"?>
 <p:sld xmlns:a="http://schemas.openxmlformats.org/drawingml/2006/main" xmlns:r="http://schemas.openxmlformats.org/officeDocument/2006/relationships" xmlns:p="http://schemas.openxmlformats.org/presentationml/2006/main">
-  <p:cSld name="Slide 48">
+  <p:cSld name="Slide 5">
     <p:spTree>
       <p:nvGrpSpPr>
         <p:cNvPr id="1" name=""/>
@@ -18125,6 +19023,225 @@
                 <a:ea typeface="Calibri" pitchFamily="34" charset="-122"/>
                 <a:cs typeface="Calibri" pitchFamily="34" charset="-120"/>
               </a:rPr>
+              <a:t>HOMEWORK CORRECTION</a:t>
+            </a:r>
+            <a:endParaRPr lang="en-US" sz="1400" dirty="0"/>
+          </a:p>
+        </p:txBody>
+      </p:sp>
+      <p:pic>
+        <p:nvPicPr>
+          <p:cNvPr id="3" name="Image 0" descr="/home/claude/f4/img/minesec_sheet.png">    </p:cNvPr>
+          <p:cNvPicPr>
+            <a:picLocks noChangeAspect="1"/>
+          </p:cNvPicPr>
+          <p:nvPr/>
+        </p:nvPicPr>
+        <p:blipFill>
+          <a:blip r:embed="rId1"/>
+          <a:stretch>
+            <a:fillRect/>
+          </a:stretch>
+        </p:blipFill>
+        <p:spPr>
+          <a:xfrm>
+            <a:off x="0" y="658368"/>
+            <a:ext cx="5120640" cy="5833872"/>
+          </a:xfrm>
+          <a:prstGeom prst="rect">
+            <a:avLst/>
+          </a:prstGeom>
+        </p:spPr>
+      </p:pic>
+      <p:sp>
+        <p:nvSpPr>
+          <p:cNvPr id="4" name="Text 1"/>
+          <p:cNvSpPr/>
+          <p:nvPr/>
+        </p:nvSpPr>
+        <p:spPr>
+          <a:xfrm>
+            <a:off x="5349240" y="1005840"/>
+            <a:ext cx="6522415" cy="731520"/>
+          </a:xfrm>
+          <a:prstGeom prst="rect">
+            <a:avLst/>
+          </a:prstGeom>
+          <a:noFill/>
+          <a:ln/>
+        </p:spPr>
+        <p:txBody>
+          <a:bodyPr wrap="square" lIns="0" tIns="0" rIns="0" bIns="0" rtlCol="0" anchor="ctr">
+            <a:normAutofit/>
+          </a:bodyPr>
+          <a:lstStyle/>
+          <a:p>
+            <a:pPr algn="ctr" indent="0" marL="0">
+              <a:buNone/>
+            </a:pPr>
+            <a:r>
+              <a:rPr lang="en-US" sz="3600" b="1" dirty="0">
+                <a:solidFill>
+                  <a:srgbClr val="990011"/>
+                </a:solidFill>
+                <a:latin typeface="Times New Roman" pitchFamily="34" charset="0"/>
+                <a:ea typeface="Times New Roman" pitchFamily="34" charset="-122"/>
+                <a:cs typeface="Times New Roman" pitchFamily="34" charset="-120"/>
+              </a:rPr>
+              <a:t>Correction: Possible Answer</a:t>
+            </a:r>
+            <a:endParaRPr lang="en-US" sz="3600" dirty="0"/>
+          </a:p>
+        </p:txBody>
+      </p:sp>
+      <p:sp>
+        <p:nvSpPr>
+          <p:cNvPr id="5" name="Text 2"/>
+          <p:cNvSpPr/>
+          <p:nvPr/>
+        </p:nvSpPr>
+        <p:spPr>
+          <a:xfrm>
+            <a:off x="5349240" y="1783080"/>
+            <a:ext cx="6522415" cy="4663440"/>
+          </a:xfrm>
+          <a:prstGeom prst="rect">
+            <a:avLst/>
+          </a:prstGeom>
+          <a:noFill/>
+          <a:ln/>
+        </p:spPr>
+        <p:txBody>
+          <a:bodyPr wrap="square" lIns="0" tIns="0" rIns="0" bIns="0" rtlCol="0" anchor="t"/>
+          <a:lstStyle/>
+          <a:p>
+            <a:pPr algn="l" indent="0" marL="0">
+              <a:spcAft>
+                <a:spcPts val="800"/>
+              </a:spcAft>
+              <a:buNone/>
+            </a:pPr>
+            <a:r>
+              <a:rPr lang="en-US" sz="4000" dirty="0">
+                <a:solidFill>
+                  <a:srgbClr val="111111"/>
+                </a:solidFill>
+                <a:latin typeface="Times New Roman" pitchFamily="34" charset="0"/>
+                <a:ea typeface="Times New Roman" pitchFamily="34" charset="-122"/>
+                <a:cs typeface="Times New Roman" pitchFamily="34" charset="-120"/>
+              </a:rPr>
+              <a:t>Answers vary. Example: tilapia and catfish from Lagdo and the Benue; frozen mackerel from the sea (often imported).</a:t>
+            </a:r>
+            <a:endParaRPr lang="en-US" sz="4000" dirty="0"/>
+          </a:p>
+        </p:txBody>
+      </p:sp>
+      <p:sp>
+        <p:nvSpPr>
+          <p:cNvPr id="25" name="Slide Number Placeholder 0"/>
+          <p:cNvSpPr>
+            <a:spLocks noGrp="1"/>
+          </p:cNvSpPr>
+          <p:nvPr>
+            <p:ph type="sldNum" sz="quarter" idx="4294967295"/>
+          </p:nvPr>
+        </p:nvSpPr>
+        <p:spPr>
+          <a:xfrm>
+            <a:off x="27432" y="91440"/>
+            <a:ext cx="585216" cy="475488"/>
+          </a:xfrm>
+          <a:prstGeom prst="rect">
+            <a:avLst/>
+          </a:prstGeom>
+          <a:extLst>
+            <a:ext uri="{C572A759-6A51-4108-AA02-DFA0A04FC94B}">
+              <ma14:wrappingTextBoxFlag xmlns:ma14="http://schemas.microsoft.com/office/mac/drawingml/2011/main" val="0"/>
+            </a:ext>
+          </a:extLst>
+        </p:spPr>
+        <p:txBody>
+          <a:bodyPr/>
+          <a:lstStyle>
+            <a:lvl1pPr>
+              <a:defRPr sz="2000">
+                <a:solidFill>
+                  <a:srgbClr val="FFFFFF"/>
+                </a:solidFill>
+                <a:latin typeface="Calibri"/>
+                <a:ea typeface="Calibri"/>
+                <a:cs typeface="Calibri"/>
+              </a:defRPr>
+            </a:lvl1pPr>
+          </a:lstStyle>
+          <a:p>
+            <a:pPr algn="ctr"/>
+            <a:fld id="{F7021451-1387-4CA6-816F-3879F97B5CBC}" type="slidenum">
+              <a:rPr b="1" lang="en-US"/>
+              <a:t>5</a:t>
+            </a:fld>
+            <a:endParaRPr lang="en-US"/>
+          </a:p>
+        </p:txBody>
+      </p:sp>
+    </p:spTree>
+  </p:cSld>
+  <p:clrMapOvr>
+    <a:masterClrMapping/>
+  </p:clrMapOvr>
+</p:sld>
+</file>
+
+<file path=ppt/slides/slide50.xml><?xml version="1.0" encoding="utf-8"?>
+<p:sld xmlns:a="http://schemas.openxmlformats.org/drawingml/2006/main" xmlns:r="http://schemas.openxmlformats.org/officeDocument/2006/relationships" xmlns:p="http://schemas.openxmlformats.org/presentationml/2006/main">
+  <p:cSld name="Slide 50">
+    <p:spTree>
+      <p:nvGrpSpPr>
+        <p:cNvPr id="1" name=""/>
+        <p:cNvGrpSpPr/>
+        <p:nvPr/>
+      </p:nvGrpSpPr>
+      <p:grpSpPr>
+        <a:xfrm>
+          <a:off x="0" y="0"/>
+          <a:ext cx="0" cy="0"/>
+          <a:chOff x="0" y="0"/>
+          <a:chExt cx="0" cy="0"/>
+        </a:xfrm>
+      </p:grpSpPr>
+      <p:sp>
+        <p:nvSpPr>
+          <p:cNvPr id="2" name="Text 0"/>
+          <p:cNvSpPr/>
+          <p:nvPr/>
+        </p:nvSpPr>
+        <p:spPr>
+          <a:xfrm>
+            <a:off x="457200" y="713232"/>
+            <a:ext cx="11368735" cy="274320"/>
+          </a:xfrm>
+          <a:prstGeom prst="rect">
+            <a:avLst/>
+          </a:prstGeom>
+          <a:noFill/>
+          <a:ln/>
+        </p:spPr>
+        <p:txBody>
+          <a:bodyPr wrap="square" lIns="0" tIns="0" rIns="0" bIns="0" rtlCol="0" anchor="ctr"/>
+          <a:lstStyle/>
+          <a:p>
+            <a:pPr algn="r" indent="0" marL="0">
+              <a:buNone/>
+            </a:pPr>
+            <a:r>
+              <a:rPr lang="en-US" sz="1400" b="1" dirty="0">
+                <a:solidFill>
+                  <a:srgbClr val="1C3F6E"/>
+                </a:solidFill>
+                <a:latin typeface="Calibri" pitchFamily="34" charset="0"/>
+                <a:ea typeface="Calibri" pitchFamily="34" charset="-122"/>
+                <a:cs typeface="Calibri" pitchFamily="34" charset="-120"/>
+              </a:rPr>
               <a:t>LOGBOOK</a:t>
             </a:r>
             <a:endParaRPr lang="en-US" sz="1400" dirty="0"/>
@@ -18172,7 +19289,7 @@
       </p:sp>
       <p:graphicFrame>
         <p:nvGraphicFramePr>
-          <p:cNvPr id="49" name="Table 0"/>
+          <p:cNvPr id="51" name="Table 0"/>
           <p:cNvGraphicFramePr>
             <a:graphicFrameLocks noGrp="1"/>
           </p:cNvGraphicFramePr>
@@ -18282,7 +19399,7 @@
                           <a:ea typeface="Calibri" pitchFamily="34" charset="-122"/>
                           <a:cs typeface="Calibri" pitchFamily="34" charset="-120"/>
                         </a:rPr>
-                        <a:t>DEFINITIONS; Classification and Distribution; Importance and Conservation.</a:t>
+                        <a:t>DEFINITIONS; Classification and Distribution; Importance; Conservation.</a:t>
                       </a:r>
                       <a:endParaRPr lang="en-US" sz="1600" dirty="0">
                         <a:latin typeface="Calibri" charset="0"/>
@@ -18932,7 +20049,7 @@
             <a:pPr algn="ctr"/>
             <a:fld id="{F7021451-1387-4CA6-816F-3879F97B5CBC}" type="slidenum">
               <a:rPr b="1" lang="en-US"/>
-              <a:t>48</a:t>
+              <a:t>50</a:t>
             </a:fld>
             <a:endParaRPr lang="en-US"/>
           </a:p>
@@ -18946,9 +20063,9 @@
 </p:sld>
 </file>
 
-<file path=ppt/slides/slide49.xml><?xml version="1.0" encoding="utf-8"?>
+<file path=ppt/slides/slide51.xml><?xml version="1.0" encoding="utf-8"?>
 <p:sld xmlns:a="http://schemas.openxmlformats.org/drawingml/2006/main" xmlns:r="http://schemas.openxmlformats.org/officeDocument/2006/relationships" xmlns:p="http://schemas.openxmlformats.org/presentationml/2006/main">
-  <p:cSld name="Slide 49">
+  <p:cSld name="Slide 51">
     <p:spTree>
       <p:nvGrpSpPr>
         <p:cNvPr id="1" name=""/>
@@ -19257,7 +20374,7 @@
             <a:pPr algn="ctr"/>
             <a:fld id="{F7021451-1387-4CA6-816F-3879F97B5CBC}" type="slidenum">
               <a:rPr b="1" lang="en-US"/>
-              <a:t>49</a:t>
+              <a:t>51</a:t>
             </a:fld>
             <a:endParaRPr lang="en-US"/>
           </a:p>
@@ -19271,9 +20388,9 @@
 </p:sld>
 </file>
 
-<file path=ppt/slides/slide5.xml><?xml version="1.0" encoding="utf-8"?>
+<file path=ppt/slides/slide52.xml><?xml version="1.0" encoding="utf-8"?>
 <p:sld xmlns:a="http://schemas.openxmlformats.org/drawingml/2006/main" xmlns:r="http://schemas.openxmlformats.org/officeDocument/2006/relationships" xmlns:p="http://schemas.openxmlformats.org/presentationml/2006/main">
-  <p:cSld name="Slide 5">
+  <p:cSld name="Slide 52">
     <p:spTree>
       <p:nvGrpSpPr>
         <p:cNvPr id="1" name=""/>
@@ -19321,7 +20438,7 @@
                 <a:ea typeface="Calibri" pitchFamily="34" charset="-122"/>
                 <a:cs typeface="Calibri" pitchFamily="34" charset="-120"/>
               </a:rPr>
-              <a:t>HOMEWORK CORRECTION</a:t>
+              <a:t>REFERENCES</a:t>
             </a:r>
             <a:endParaRPr lang="en-US" sz="1400" dirty="0"/>
           </a:p>
@@ -19386,7 +20503,7 @@
                 <a:ea typeface="Times New Roman" pitchFamily="34" charset="-122"/>
                 <a:cs typeface="Times New Roman" pitchFamily="34" charset="-120"/>
               </a:rPr>
-              <a:t>Correction: Possible Answer</a:t>
+              <a:t>References</a:t>
             </a:r>
             <a:endParaRPr lang="en-US" sz="3600" dirty="0"/>
           </a:p>
@@ -19413,24 +20530,109 @@
           <a:bodyPr wrap="square" lIns="0" tIns="0" rIns="0" bIns="0" rtlCol="0" anchor="t"/>
           <a:lstStyle/>
           <a:p>
-            <a:pPr algn="l" indent="0" marL="0">
+            <a:pPr algn="l" marL="342900" indent="-342900">
               <a:spcAft>
                 <a:spcPts val="800"/>
               </a:spcAft>
-              <a:buNone/>
+              <a:buSzPct val="100000"/>
+              <a:buChar char="•"/>
             </a:pPr>
             <a:r>
-              <a:rPr lang="en-US" sz="4000" dirty="0">
+              <a:rPr lang="en-US" sz="1800" dirty="0">
                 <a:solidFill>
                   <a:srgbClr val="111111"/>
                 </a:solidFill>
-                <a:latin typeface="Times New Roman" pitchFamily="34" charset="0"/>
-                <a:ea typeface="Times New Roman" pitchFamily="34" charset="-122"/>
-                <a:cs typeface="Times New Roman" pitchFamily="34" charset="-120"/>
+                <a:latin typeface="Calibri" pitchFamily="34" charset="0"/>
+                <a:ea typeface="Calibri" pitchFamily="34" charset="-122"/>
+                <a:cs typeface="Calibri" pitchFamily="34" charset="-120"/>
               </a:rPr>
-              <a:t>Answers vary. Example: tilapia and catfish from Lagdo and the Benue; frozen mackerel from the sea (often imported).</a:t>
-            </a:r>
-            <a:endParaRPr lang="en-US" sz="4000" dirty="0"/>
+              <a:t>Geography Syllabus, Forms I–V, MINESEC (2023) — Form 4, Module II: Development and the Management of Primary Resources.</a:t>
+            </a:r>
+            <a:endParaRPr lang="en-US" sz="1800" dirty="0"/>
+          </a:p>
+          <a:p>
+            <a:pPr algn="l" marL="342900" indent="-342900">
+              <a:spcAft>
+                <a:spcPts val="800"/>
+              </a:spcAft>
+              <a:buSzPct val="100000"/>
+              <a:buChar char="•"/>
+            </a:pPr>
+            <a:r>
+              <a:rPr lang="en-US" sz="1800" dirty="0">
+                <a:solidFill>
+                  <a:srgbClr val="111111"/>
+                </a:solidFill>
+                <a:latin typeface="Calibri" pitchFamily="34" charset="0"/>
+                <a:ea typeface="Calibri" pitchFamily="34" charset="-122"/>
+                <a:cs typeface="Calibri" pitchFamily="34" charset="-120"/>
+              </a:rPr>
+              <a:t>Photo, Activity 2: “2017-91-06” by Community Archives of Belleville &amp; Hastings County, CC0 1.0, via Flickr (https://www.flickr.com/photos/134017397@N03/37070933734)</a:t>
+            </a:r>
+            <a:endParaRPr lang="en-US" sz="1800" dirty="0"/>
+          </a:p>
+          <a:p>
+            <a:pPr algn="l" marL="342900" indent="-342900">
+              <a:spcAft>
+                <a:spcPts val="800"/>
+              </a:spcAft>
+              <a:buSzPct val="100000"/>
+              <a:buChar char="•"/>
+            </a:pPr>
+            <a:r>
+              <a:rPr lang="en-US" sz="1800" dirty="0">
+                <a:solidFill>
+                  <a:srgbClr val="111111"/>
+                </a:solidFill>
+                <a:latin typeface="Calibri" pitchFamily="34" charset="0"/>
+                <a:ea typeface="Calibri" pitchFamily="34" charset="-122"/>
+                <a:cs typeface="Calibri" pitchFamily="34" charset="-120"/>
+              </a:rPr>
+              <a:t>Photo, Activity 3: “Belval steel works, Luxembourg, May 1995” by sludgegulper, CC BY-SA 2.0, via Flickr (https://www.flickr.com/photos/28179929@N08/4991135732)</a:t>
+            </a:r>
+            <a:endParaRPr lang="en-US" sz="1800" dirty="0"/>
+          </a:p>
+          <a:p>
+            <a:pPr algn="l" marL="342900" indent="-342900">
+              <a:spcAft>
+                <a:spcPts val="800"/>
+              </a:spcAft>
+              <a:buSzPct val="100000"/>
+              <a:buChar char="•"/>
+            </a:pPr>
+            <a:r>
+              <a:rPr lang="en-US" sz="1800" dirty="0">
+                <a:solidFill>
+                  <a:srgbClr val="111111"/>
+                </a:solidFill>
+                <a:latin typeface="Calibri" pitchFamily="34" charset="0"/>
+                <a:ea typeface="Calibri" pitchFamily="34" charset="-122"/>
+                <a:cs typeface="Calibri" pitchFamily="34" charset="-120"/>
+              </a:rPr>
+              <a:t>Photo, Activity 5: “Do the evolution” by Marco Bellucci, CC BY 2.0, via Flickr (https://www.flickr.com/photos/50451886@N00/3382099741)</a:t>
+            </a:r>
+            <a:endParaRPr lang="en-US" sz="1800" dirty="0"/>
+          </a:p>
+          <a:p>
+            <a:pPr algn="l" marL="342900" indent="-342900">
+              <a:spcAft>
+                <a:spcPts val="800"/>
+              </a:spcAft>
+              <a:buSzPct val="100000"/>
+              <a:buChar char="•"/>
+            </a:pPr>
+            <a:r>
+              <a:rPr lang="en-US" sz="1800" dirty="0">
+                <a:solidFill>
+                  <a:srgbClr val="111111"/>
+                </a:solidFill>
+                <a:latin typeface="Calibri" pitchFamily="34" charset="0"/>
+                <a:ea typeface="Calibri" pitchFamily="34" charset="-122"/>
+                <a:cs typeface="Calibri" pitchFamily="34" charset="-120"/>
+              </a:rPr>
+              <a:t>Diagrams and animations: drawn for this lesson (Geography Department).</a:t>
+            </a:r>
+            <a:endParaRPr lang="en-US" sz="1800" dirty="0"/>
           </a:p>
         </p:txBody>
       </p:sp>
@@ -19476,311 +20678,7 @@
             <a:pPr algn="ctr"/>
             <a:fld id="{F7021451-1387-4CA6-816F-3879F97B5CBC}" type="slidenum">
               <a:rPr b="1" lang="en-US"/>
-              <a:t>5</a:t>
-            </a:fld>
-            <a:endParaRPr lang="en-US"/>
-          </a:p>
-        </p:txBody>
-      </p:sp>
-    </p:spTree>
-  </p:cSld>
-  <p:clrMapOvr>
-    <a:masterClrMapping/>
-  </p:clrMapOvr>
-</p:sld>
-</file>
-
-<file path=ppt/slides/slide50.xml><?xml version="1.0" encoding="utf-8"?>
-<p:sld xmlns:a="http://schemas.openxmlformats.org/drawingml/2006/main" xmlns:r="http://schemas.openxmlformats.org/officeDocument/2006/relationships" xmlns:p="http://schemas.openxmlformats.org/presentationml/2006/main">
-  <p:cSld name="Slide 50">
-    <p:spTree>
-      <p:nvGrpSpPr>
-        <p:cNvPr id="1" name=""/>
-        <p:cNvGrpSpPr/>
-        <p:nvPr/>
-      </p:nvGrpSpPr>
-      <p:grpSpPr>
-        <a:xfrm>
-          <a:off x="0" y="0"/>
-          <a:ext cx="0" cy="0"/>
-          <a:chOff x="0" y="0"/>
-          <a:chExt cx="0" cy="0"/>
-        </a:xfrm>
-      </p:grpSpPr>
-      <p:sp>
-        <p:nvSpPr>
-          <p:cNvPr id="2" name="Text 0"/>
-          <p:cNvSpPr/>
-          <p:nvPr/>
-        </p:nvSpPr>
-        <p:spPr>
-          <a:xfrm>
-            <a:off x="457200" y="713232"/>
-            <a:ext cx="11368735" cy="274320"/>
-          </a:xfrm>
-          <a:prstGeom prst="rect">
-            <a:avLst/>
-          </a:prstGeom>
-          <a:noFill/>
-          <a:ln/>
-        </p:spPr>
-        <p:txBody>
-          <a:bodyPr wrap="square" lIns="0" tIns="0" rIns="0" bIns="0" rtlCol="0" anchor="ctr"/>
-          <a:lstStyle/>
-          <a:p>
-            <a:pPr algn="r" indent="0" marL="0">
-              <a:buNone/>
-            </a:pPr>
-            <a:r>
-              <a:rPr lang="en-US" sz="1400" b="1" dirty="0">
-                <a:solidFill>
-                  <a:srgbClr val="1C3F6E"/>
-                </a:solidFill>
-                <a:latin typeface="Calibri" pitchFamily="34" charset="0"/>
-                <a:ea typeface="Calibri" pitchFamily="34" charset="-122"/>
-                <a:cs typeface="Calibri" pitchFamily="34" charset="-120"/>
-              </a:rPr>
-              <a:t>REFERENCES</a:t>
-            </a:r>
-            <a:endParaRPr lang="en-US" sz="1400" dirty="0"/>
-          </a:p>
-        </p:txBody>
-      </p:sp>
-      <p:pic>
-        <p:nvPicPr>
-          <p:cNvPr id="3" name="Image 0" descr="/home/claude/f4/img/minesec_sheet.png">    </p:cNvPr>
-          <p:cNvPicPr>
-            <a:picLocks noChangeAspect="1"/>
-          </p:cNvPicPr>
-          <p:nvPr/>
-        </p:nvPicPr>
-        <p:blipFill>
-          <a:blip r:embed="rId1"/>
-          <a:stretch>
-            <a:fillRect/>
-          </a:stretch>
-        </p:blipFill>
-        <p:spPr>
-          <a:xfrm>
-            <a:off x="0" y="658368"/>
-            <a:ext cx="5120640" cy="5833872"/>
-          </a:xfrm>
-          <a:prstGeom prst="rect">
-            <a:avLst/>
-          </a:prstGeom>
-        </p:spPr>
-      </p:pic>
-      <p:sp>
-        <p:nvSpPr>
-          <p:cNvPr id="4" name="Text 1"/>
-          <p:cNvSpPr/>
-          <p:nvPr/>
-        </p:nvSpPr>
-        <p:spPr>
-          <a:xfrm>
-            <a:off x="5349240" y="1005840"/>
-            <a:ext cx="6522415" cy="731520"/>
-          </a:xfrm>
-          <a:prstGeom prst="rect">
-            <a:avLst/>
-          </a:prstGeom>
-          <a:noFill/>
-          <a:ln/>
-        </p:spPr>
-        <p:txBody>
-          <a:bodyPr wrap="square" lIns="0" tIns="0" rIns="0" bIns="0" rtlCol="0" anchor="ctr">
-            <a:normAutofit/>
-          </a:bodyPr>
-          <a:lstStyle/>
-          <a:p>
-            <a:pPr algn="ctr" indent="0" marL="0">
-              <a:buNone/>
-            </a:pPr>
-            <a:r>
-              <a:rPr lang="en-US" sz="3600" b="1" dirty="0">
-                <a:solidFill>
-                  <a:srgbClr val="990011"/>
-                </a:solidFill>
-                <a:latin typeface="Times New Roman" pitchFamily="34" charset="0"/>
-                <a:ea typeface="Times New Roman" pitchFamily="34" charset="-122"/>
-                <a:cs typeface="Times New Roman" pitchFamily="34" charset="-120"/>
-              </a:rPr>
-              <a:t>References</a:t>
-            </a:r>
-            <a:endParaRPr lang="en-US" sz="3600" dirty="0"/>
-          </a:p>
-        </p:txBody>
-      </p:sp>
-      <p:sp>
-        <p:nvSpPr>
-          <p:cNvPr id="5" name="Text 2"/>
-          <p:cNvSpPr/>
-          <p:nvPr/>
-        </p:nvSpPr>
-        <p:spPr>
-          <a:xfrm>
-            <a:off x="5349240" y="1783080"/>
-            <a:ext cx="6522415" cy="4663440"/>
-          </a:xfrm>
-          <a:prstGeom prst="rect">
-            <a:avLst/>
-          </a:prstGeom>
-          <a:noFill/>
-          <a:ln/>
-        </p:spPr>
-        <p:txBody>
-          <a:bodyPr wrap="square" lIns="0" tIns="0" rIns="0" bIns="0" rtlCol="0" anchor="t"/>
-          <a:lstStyle/>
-          <a:p>
-            <a:pPr algn="l" marL="342900" indent="-342900">
-              <a:spcAft>
-                <a:spcPts val="800"/>
-              </a:spcAft>
-              <a:buSzPct val="100000"/>
-              <a:buChar char="•"/>
-            </a:pPr>
-            <a:r>
-              <a:rPr lang="en-US" sz="1800" dirty="0">
-                <a:solidFill>
-                  <a:srgbClr val="111111"/>
-                </a:solidFill>
-                <a:latin typeface="Calibri" pitchFamily="34" charset="0"/>
-                <a:ea typeface="Calibri" pitchFamily="34" charset="-122"/>
-                <a:cs typeface="Calibri" pitchFamily="34" charset="-120"/>
-              </a:rPr>
-              <a:t>Geography Syllabus, Forms I–V, MINESEC (2023) — Form 4, Module II: Development and the Management of Primary Resources.</a:t>
-            </a:r>
-            <a:endParaRPr lang="en-US" sz="1800" dirty="0"/>
-          </a:p>
-          <a:p>
-            <a:pPr algn="l" marL="342900" indent="-342900">
-              <a:spcAft>
-                <a:spcPts val="800"/>
-              </a:spcAft>
-              <a:buSzPct val="100000"/>
-              <a:buChar char="•"/>
-            </a:pPr>
-            <a:r>
-              <a:rPr lang="en-US" sz="1800" dirty="0">
-                <a:solidFill>
-                  <a:srgbClr val="111111"/>
-                </a:solidFill>
-                <a:latin typeface="Calibri" pitchFamily="34" charset="0"/>
-                <a:ea typeface="Calibri" pitchFamily="34" charset="-122"/>
-                <a:cs typeface="Calibri" pitchFamily="34" charset="-120"/>
-              </a:rPr>
-              <a:t>Photo, Activity 2: “2017-91-06” by Community Archives of Belleville &amp; Hastings County, CC0 1.0, via Flickr (https://www.flickr.com/photos/134017397@N03/37070933734)</a:t>
-            </a:r>
-            <a:endParaRPr lang="en-US" sz="1800" dirty="0"/>
-          </a:p>
-          <a:p>
-            <a:pPr algn="l" marL="342900" indent="-342900">
-              <a:spcAft>
-                <a:spcPts val="800"/>
-              </a:spcAft>
-              <a:buSzPct val="100000"/>
-              <a:buChar char="•"/>
-            </a:pPr>
-            <a:r>
-              <a:rPr lang="en-US" sz="1800" dirty="0">
-                <a:solidFill>
-                  <a:srgbClr val="111111"/>
-                </a:solidFill>
-                <a:latin typeface="Calibri" pitchFamily="34" charset="0"/>
-                <a:ea typeface="Calibri" pitchFamily="34" charset="-122"/>
-                <a:cs typeface="Calibri" pitchFamily="34" charset="-120"/>
-              </a:rPr>
-              <a:t>Photo, Activity 3: “Belval steel works, Luxembourg, May 1995” by sludgegulper, CC BY-SA 2.0, via Flickr (https://www.flickr.com/photos/28179929@N08/4991135732)</a:t>
-            </a:r>
-            <a:endParaRPr lang="en-US" sz="1800" dirty="0"/>
-          </a:p>
-          <a:p>
-            <a:pPr algn="l" marL="342900" indent="-342900">
-              <a:spcAft>
-                <a:spcPts val="800"/>
-              </a:spcAft>
-              <a:buSzPct val="100000"/>
-              <a:buChar char="•"/>
-            </a:pPr>
-            <a:r>
-              <a:rPr lang="en-US" sz="1800" dirty="0">
-                <a:solidFill>
-                  <a:srgbClr val="111111"/>
-                </a:solidFill>
-                <a:latin typeface="Calibri" pitchFamily="34" charset="0"/>
-                <a:ea typeface="Calibri" pitchFamily="34" charset="-122"/>
-                <a:cs typeface="Calibri" pitchFamily="34" charset="-120"/>
-              </a:rPr>
-              <a:t>Photo, Activity 5: “Do the evolution” by Marco Bellucci, CC BY 2.0, via Flickr (https://www.flickr.com/photos/50451886@N00/3382099741)</a:t>
-            </a:r>
-            <a:endParaRPr lang="en-US" sz="1800" dirty="0"/>
-          </a:p>
-          <a:p>
-            <a:pPr algn="l" marL="342900" indent="-342900">
-              <a:spcAft>
-                <a:spcPts val="800"/>
-              </a:spcAft>
-              <a:buSzPct val="100000"/>
-              <a:buChar char="•"/>
-            </a:pPr>
-            <a:r>
-              <a:rPr lang="en-US" sz="1800" dirty="0">
-                <a:solidFill>
-                  <a:srgbClr val="111111"/>
-                </a:solidFill>
-                <a:latin typeface="Calibri" pitchFamily="34" charset="0"/>
-                <a:ea typeface="Calibri" pitchFamily="34" charset="-122"/>
-                <a:cs typeface="Calibri" pitchFamily="34" charset="-120"/>
-              </a:rPr>
-              <a:t>Diagrams and animations: drawn for this lesson (Geography Department).</a:t>
-            </a:r>
-            <a:endParaRPr lang="en-US" sz="1800" dirty="0"/>
-          </a:p>
-        </p:txBody>
-      </p:sp>
-      <p:sp>
-        <p:nvSpPr>
-          <p:cNvPr id="25" name="Slide Number Placeholder 0"/>
-          <p:cNvSpPr>
-            <a:spLocks noGrp="1"/>
-          </p:cNvSpPr>
-          <p:nvPr>
-            <p:ph type="sldNum" sz="quarter" idx="4294967295"/>
-          </p:nvPr>
-        </p:nvSpPr>
-        <p:spPr>
-          <a:xfrm>
-            <a:off x="27432" y="91440"/>
-            <a:ext cx="585216" cy="475488"/>
-          </a:xfrm>
-          <a:prstGeom prst="rect">
-            <a:avLst/>
-          </a:prstGeom>
-          <a:extLst>
-            <a:ext uri="{C572A759-6A51-4108-AA02-DFA0A04FC94B}">
-              <ma14:wrappingTextBoxFlag xmlns:ma14="http://schemas.microsoft.com/office/mac/drawingml/2011/main" val="0"/>
-            </a:ext>
-          </a:extLst>
-        </p:spPr>
-        <p:txBody>
-          <a:bodyPr/>
-          <a:lstStyle>
-            <a:lvl1pPr>
-              <a:defRPr sz="2000">
-                <a:solidFill>
-                  <a:srgbClr val="FFFFFF"/>
-                </a:solidFill>
-                <a:latin typeface="Calibri"/>
-                <a:ea typeface="Calibri"/>
-                <a:cs typeface="Calibri"/>
-              </a:defRPr>
-            </a:lvl1pPr>
-          </a:lstStyle>
-          <a:p>
-            <a:pPr algn="ctr"/>
-            <a:fld id="{F7021451-1387-4CA6-816F-3879F97B5CBC}" type="slidenum">
-              <a:rPr b="1" lang="en-US"/>
-              <a:t>50</a:t>
+              <a:t>52</a:t>
             </a:fld>
             <a:endParaRPr lang="en-US"/>
           </a:p>
